--- a/flowchart.pptx
+++ b/flowchart.pptx
@@ -259,7 +259,7 @@
           <a:p>
             <a:fld id="{2A846C9A-3B73-4072-A1B3-7C15C8E1070C}" type="datetimeFigureOut">
               <a:rPr lang="en-US" smtClean="0"/>
-              <a:t>1/13/2026</a:t>
+              <a:t>2/1/2026</a:t>
             </a:fld>
             <a:endParaRPr lang="en-US"/>
           </a:p>
@@ -457,7 +457,7 @@
           <a:p>
             <a:fld id="{2A846C9A-3B73-4072-A1B3-7C15C8E1070C}" type="datetimeFigureOut">
               <a:rPr lang="en-US" smtClean="0"/>
-              <a:t>1/13/2026</a:t>
+              <a:t>2/1/2026</a:t>
             </a:fld>
             <a:endParaRPr lang="en-US"/>
           </a:p>
@@ -665,7 +665,7 @@
           <a:p>
             <a:fld id="{2A846C9A-3B73-4072-A1B3-7C15C8E1070C}" type="datetimeFigureOut">
               <a:rPr lang="en-US" smtClean="0"/>
-              <a:t>1/13/2026</a:t>
+              <a:t>2/1/2026</a:t>
             </a:fld>
             <a:endParaRPr lang="en-US"/>
           </a:p>
@@ -863,7 +863,7 @@
           <a:p>
             <a:fld id="{2A846C9A-3B73-4072-A1B3-7C15C8E1070C}" type="datetimeFigureOut">
               <a:rPr lang="en-US" smtClean="0"/>
-              <a:t>1/13/2026</a:t>
+              <a:t>2/1/2026</a:t>
             </a:fld>
             <a:endParaRPr lang="en-US"/>
           </a:p>
@@ -1138,7 +1138,7 @@
           <a:p>
             <a:fld id="{2A846C9A-3B73-4072-A1B3-7C15C8E1070C}" type="datetimeFigureOut">
               <a:rPr lang="en-US" smtClean="0"/>
-              <a:t>1/13/2026</a:t>
+              <a:t>2/1/2026</a:t>
             </a:fld>
             <a:endParaRPr lang="en-US"/>
           </a:p>
@@ -1403,7 +1403,7 @@
           <a:p>
             <a:fld id="{2A846C9A-3B73-4072-A1B3-7C15C8E1070C}" type="datetimeFigureOut">
               <a:rPr lang="en-US" smtClean="0"/>
-              <a:t>1/13/2026</a:t>
+              <a:t>2/1/2026</a:t>
             </a:fld>
             <a:endParaRPr lang="en-US"/>
           </a:p>
@@ -1815,7 +1815,7 @@
           <a:p>
             <a:fld id="{2A846C9A-3B73-4072-A1B3-7C15C8E1070C}" type="datetimeFigureOut">
               <a:rPr lang="en-US" smtClean="0"/>
-              <a:t>1/13/2026</a:t>
+              <a:t>2/1/2026</a:t>
             </a:fld>
             <a:endParaRPr lang="en-US"/>
           </a:p>
@@ -1956,7 +1956,7 @@
           <a:p>
             <a:fld id="{2A846C9A-3B73-4072-A1B3-7C15C8E1070C}" type="datetimeFigureOut">
               <a:rPr lang="en-US" smtClean="0"/>
-              <a:t>1/13/2026</a:t>
+              <a:t>2/1/2026</a:t>
             </a:fld>
             <a:endParaRPr lang="en-US"/>
           </a:p>
@@ -2069,7 +2069,7 @@
           <a:p>
             <a:fld id="{2A846C9A-3B73-4072-A1B3-7C15C8E1070C}" type="datetimeFigureOut">
               <a:rPr lang="en-US" smtClean="0"/>
-              <a:t>1/13/2026</a:t>
+              <a:t>2/1/2026</a:t>
             </a:fld>
             <a:endParaRPr lang="en-US"/>
           </a:p>
@@ -2380,7 +2380,7 @@
           <a:p>
             <a:fld id="{2A846C9A-3B73-4072-A1B3-7C15C8E1070C}" type="datetimeFigureOut">
               <a:rPr lang="en-US" smtClean="0"/>
-              <a:t>1/13/2026</a:t>
+              <a:t>2/1/2026</a:t>
             </a:fld>
             <a:endParaRPr lang="en-US"/>
           </a:p>
@@ -2668,7 +2668,7 @@
           <a:p>
             <a:fld id="{2A846C9A-3B73-4072-A1B3-7C15C8E1070C}" type="datetimeFigureOut">
               <a:rPr lang="en-US" smtClean="0"/>
-              <a:t>1/13/2026</a:t>
+              <a:t>2/1/2026</a:t>
             </a:fld>
             <a:endParaRPr lang="en-US"/>
           </a:p>
@@ -2909,7 +2909,7 @@
           <a:p>
             <a:fld id="{2A846C9A-3B73-4072-A1B3-7C15C8E1070C}" type="datetimeFigureOut">
               <a:rPr lang="en-US" smtClean="0"/>
-              <a:t>1/13/2026</a:t>
+              <a:t>2/1/2026</a:t>
             </a:fld>
             <a:endParaRPr lang="en-US"/>
           </a:p>
@@ -3340,8 +3340,8 @@
         </p:nvSpPr>
         <p:spPr>
           <a:xfrm>
-            <a:off x="1996198" y="2387011"/>
-            <a:ext cx="2550695" cy="2743690"/>
+            <a:off x="2562859" y="2505455"/>
+            <a:ext cx="2444545" cy="2551173"/>
           </a:xfrm>
           <a:prstGeom prst="roundRect">
             <a:avLst/>
@@ -3365,47 +3365,67 @@
           <a:bodyPr rtlCol="0" anchor="ctr"/>
           <a:lstStyle/>
           <a:p>
-            <a:pPr algn="ctr"/>
-            <a:r>
-              <a:rPr lang="en-US" sz="1400" b="1" dirty="0"/>
+            <a:r>
+              <a:rPr lang="en-US" sz="1400" b="1" dirty="0">
+                <a:latin typeface="Times New Roman" panose="02020603050405020304" pitchFamily="18" charset="0"/>
+                <a:cs typeface="Times New Roman" panose="02020603050405020304" pitchFamily="18" charset="0"/>
+              </a:rPr>
               <a:t>Self-Supervised Training</a:t>
             </a:r>
           </a:p>
           <a:p>
-            <a:pPr algn="ctr"/>
-            <a:endParaRPr lang="en-US" sz="1400" b="1" dirty="0"/>
-          </a:p>
-          <a:p>
-            <a:pPr algn="ctr"/>
-            <a:endParaRPr lang="en-US" b="1" dirty="0"/>
-          </a:p>
-          <a:p>
-            <a:pPr algn="ctr"/>
-            <a:endParaRPr lang="en-US" b="1" dirty="0"/>
-          </a:p>
-          <a:p>
-            <a:pPr algn="ctr"/>
-            <a:endParaRPr lang="en-US" b="1" dirty="0"/>
-          </a:p>
-          <a:p>
-            <a:pPr algn="ctr"/>
-            <a:endParaRPr lang="en-US" b="1" dirty="0"/>
-          </a:p>
-          <a:p>
-            <a:pPr algn="ctr"/>
-            <a:endParaRPr lang="en-US" b="1" dirty="0"/>
-          </a:p>
-          <a:p>
-            <a:pPr algn="ctr"/>
-            <a:endParaRPr lang="en-US" b="1" dirty="0"/>
-          </a:p>
-          <a:p>
-            <a:pPr algn="ctr"/>
-            <a:endParaRPr lang="en-US" b="1" dirty="0"/>
-          </a:p>
-          <a:p>
-            <a:pPr algn="ctr"/>
-            <a:endParaRPr lang="en-US" b="1" dirty="0"/>
+            <a:endParaRPr lang="en-US" sz="1400" b="1" dirty="0">
+              <a:latin typeface="Times New Roman" panose="02020603050405020304" pitchFamily="18" charset="0"/>
+              <a:cs typeface="Times New Roman" panose="02020603050405020304" pitchFamily="18" charset="0"/>
+            </a:endParaRPr>
+          </a:p>
+          <a:p>
+            <a:endParaRPr lang="en-US" b="1" dirty="0">
+              <a:latin typeface="Times New Roman" panose="02020603050405020304" pitchFamily="18" charset="0"/>
+              <a:cs typeface="Times New Roman" panose="02020603050405020304" pitchFamily="18" charset="0"/>
+            </a:endParaRPr>
+          </a:p>
+          <a:p>
+            <a:endParaRPr lang="en-US" b="1" dirty="0">
+              <a:latin typeface="Times New Roman" panose="02020603050405020304" pitchFamily="18" charset="0"/>
+              <a:cs typeface="Times New Roman" panose="02020603050405020304" pitchFamily="18" charset="0"/>
+            </a:endParaRPr>
+          </a:p>
+          <a:p>
+            <a:endParaRPr lang="en-US" b="1" dirty="0">
+              <a:latin typeface="Times New Roman" panose="02020603050405020304" pitchFamily="18" charset="0"/>
+              <a:cs typeface="Times New Roman" panose="02020603050405020304" pitchFamily="18" charset="0"/>
+            </a:endParaRPr>
+          </a:p>
+          <a:p>
+            <a:endParaRPr lang="en-US" b="1" dirty="0">
+              <a:latin typeface="Times New Roman" panose="02020603050405020304" pitchFamily="18" charset="0"/>
+              <a:cs typeface="Times New Roman" panose="02020603050405020304" pitchFamily="18" charset="0"/>
+            </a:endParaRPr>
+          </a:p>
+          <a:p>
+            <a:endParaRPr lang="en-US" b="1" dirty="0">
+              <a:latin typeface="Times New Roman" panose="02020603050405020304" pitchFamily="18" charset="0"/>
+              <a:cs typeface="Times New Roman" panose="02020603050405020304" pitchFamily="18" charset="0"/>
+            </a:endParaRPr>
+          </a:p>
+          <a:p>
+            <a:endParaRPr lang="en-US" b="1" dirty="0">
+              <a:latin typeface="Times New Roman" panose="02020603050405020304" pitchFamily="18" charset="0"/>
+              <a:cs typeface="Times New Roman" panose="02020603050405020304" pitchFamily="18" charset="0"/>
+            </a:endParaRPr>
+          </a:p>
+          <a:p>
+            <a:endParaRPr lang="en-US" b="1" dirty="0">
+              <a:latin typeface="Times New Roman" panose="02020603050405020304" pitchFamily="18" charset="0"/>
+              <a:cs typeface="Times New Roman" panose="02020603050405020304" pitchFamily="18" charset="0"/>
+            </a:endParaRPr>
+          </a:p>
+          <a:p>
+            <a:endParaRPr lang="en-US" b="1" dirty="0">
+              <a:latin typeface="Times New Roman" panose="02020603050405020304" pitchFamily="18" charset="0"/>
+              <a:cs typeface="Times New Roman" panose="02020603050405020304" pitchFamily="18" charset="0"/>
+            </a:endParaRPr>
           </a:p>
         </p:txBody>
       </p:sp>
@@ -3423,8 +3443,8 @@
         </p:nvSpPr>
         <p:spPr>
           <a:xfrm>
-            <a:off x="182880" y="1109853"/>
-            <a:ext cx="1426464" cy="718429"/>
+            <a:off x="53149" y="1014984"/>
+            <a:ext cx="1426464" cy="812695"/>
           </a:xfrm>
           <a:prstGeom prst="rect">
             <a:avLst/>
@@ -3448,49 +3468,550 @@
           <a:bodyPr rtlCol="0" anchor="ctr"/>
           <a:lstStyle/>
           <a:p>
-            <a:pPr algn="ctr"/>
-            <a:r>
-              <a:rPr lang="en-US" sz="1400" b="1" dirty="0"/>
+            <a:r>
+              <a:rPr lang="en-US" sz="1400" b="1" dirty="0">
+                <a:latin typeface="Times New Roman" panose="02020603050405020304" pitchFamily="18" charset="0"/>
+                <a:cs typeface="Times New Roman" panose="02020603050405020304" pitchFamily="18" charset="0"/>
+              </a:rPr>
               <a:t>Input </a:t>
             </a:r>
           </a:p>
           <a:p>
-            <a:pPr algn="ctr"/>
-            <a:r>
-              <a:rPr lang="en-US" sz="1100" dirty="0"/>
+            <a:r>
+              <a:rPr lang="en-US" sz="1200" dirty="0">
+                <a:latin typeface="Times New Roman" panose="02020603050405020304" pitchFamily="18" charset="0"/>
+                <a:cs typeface="Times New Roman" panose="02020603050405020304" pitchFamily="18" charset="0"/>
+              </a:rPr>
               <a:t>5D CycIF Volume     V (T, C, Z, Y, X)     Parameters: r, R, </a:t>
             </a:r>
             <a:r>
-              <a:rPr lang="el-GR" sz="1100" dirty="0"/>
-              <a:t>γ, τ </a:t>
-            </a:r>
-            <a:endParaRPr lang="en-US" sz="1100" dirty="0"/>
+              <a:rPr lang="el-GR" sz="1200" dirty="0">
+                <a:latin typeface="Times New Roman" panose="02020603050405020304" pitchFamily="18" charset="0"/>
+                <a:cs typeface="Times New Roman" panose="02020603050405020304" pitchFamily="18" charset="0"/>
+              </a:rPr>
+              <a:t>γ,τ </a:t>
+            </a:r>
+            <a:endParaRPr lang="en-US" sz="1200" dirty="0">
+              <a:latin typeface="Times New Roman" panose="02020603050405020304" pitchFamily="18" charset="0"/>
+              <a:cs typeface="Times New Roman" panose="02020603050405020304" pitchFamily="18" charset="0"/>
+            </a:endParaRPr>
+          </a:p>
+        </p:txBody>
+      </p:sp>
+      <p:sp>
+        <p:nvSpPr>
+          <p:cNvPr id="7" name="Rectangle 6">
+            <a:extLst>
+              <a:ext uri="{FF2B5EF4-FFF2-40B4-BE49-F238E27FC236}">
+                <a16:creationId xmlns:a16="http://schemas.microsoft.com/office/drawing/2014/main" id="{42BA620E-636C-D9AD-20B0-C6EF444E251D}"/>
+              </a:ext>
+            </a:extLst>
+          </p:cNvPr>
+          <p:cNvSpPr/>
+          <p:nvPr/>
+        </p:nvSpPr>
+        <p:spPr>
+          <a:xfrm>
+            <a:off x="4653258" y="1008740"/>
+            <a:ext cx="1520085" cy="818939"/>
+          </a:xfrm>
+          <a:prstGeom prst="rect">
+            <a:avLst/>
+          </a:prstGeom>
+        </p:spPr>
+        <p:style>
+          <a:lnRef idx="2">
+            <a:schemeClr val="dk1"/>
+          </a:lnRef>
+          <a:fillRef idx="1">
+            <a:schemeClr val="lt1"/>
+          </a:fillRef>
+          <a:effectRef idx="0">
+            <a:schemeClr val="dk1"/>
+          </a:effectRef>
+          <a:fontRef idx="minor">
+            <a:schemeClr val="dk1"/>
+          </a:fontRef>
+        </p:style>
+        <p:txBody>
+          <a:bodyPr rtlCol="0" anchor="ctr"/>
+          <a:lstStyle/>
+          <a:p>
+            <a:r>
+              <a:rPr lang="en-US" sz="1400" b="1" dirty="0">
+                <a:latin typeface="Times New Roman" panose="02020603050405020304" pitchFamily="18" charset="0"/>
+                <a:cs typeface="Times New Roman" panose="02020603050405020304" pitchFamily="18" charset="0"/>
+              </a:rPr>
+              <a:t>Node/Edge preparation</a:t>
+            </a:r>
+          </a:p>
+          <a:p>
+            <a:r>
+              <a:rPr lang="en-US" sz="1200" dirty="0">
+                <a:latin typeface="Times New Roman" panose="02020603050405020304" pitchFamily="18" charset="0"/>
+                <a:cs typeface="Times New Roman" panose="02020603050405020304" pitchFamily="18" charset="0"/>
+              </a:rPr>
+              <a:t>Partition Volume into composite voxels</a:t>
+            </a:r>
+          </a:p>
+        </p:txBody>
+      </p:sp>
+      <p:sp>
+        <p:nvSpPr>
+          <p:cNvPr id="11" name="Rectangle 10">
+            <a:extLst>
+              <a:ext uri="{FF2B5EF4-FFF2-40B4-BE49-F238E27FC236}">
+                <a16:creationId xmlns:a16="http://schemas.microsoft.com/office/drawing/2014/main" id="{48EE7798-9206-27AC-5586-B68DFC18AFF3}"/>
+              </a:ext>
+            </a:extLst>
+          </p:cNvPr>
+          <p:cNvSpPr/>
+          <p:nvPr/>
+        </p:nvSpPr>
+        <p:spPr>
+          <a:xfrm>
+            <a:off x="2351151" y="1014984"/>
+            <a:ext cx="1527915" cy="818940"/>
+          </a:xfrm>
+          <a:prstGeom prst="rect">
+            <a:avLst/>
+          </a:prstGeom>
+        </p:spPr>
+        <p:style>
+          <a:lnRef idx="2">
+            <a:schemeClr val="dk1"/>
+          </a:lnRef>
+          <a:fillRef idx="1">
+            <a:schemeClr val="lt1"/>
+          </a:fillRef>
+          <a:effectRef idx="0">
+            <a:schemeClr val="dk1"/>
+          </a:effectRef>
+          <a:fontRef idx="minor">
+            <a:schemeClr val="dk1"/>
+          </a:fontRef>
+        </p:style>
+        <p:txBody>
+          <a:bodyPr rtlCol="0" anchor="ctr"/>
+          <a:lstStyle/>
+          <a:p>
+            <a:r>
+              <a:rPr lang="en-US" sz="1400" b="1" dirty="0">
+                <a:latin typeface="Times New Roman" panose="02020603050405020304" pitchFamily="18" charset="0"/>
+                <a:cs typeface="Times New Roman" panose="02020603050405020304" pitchFamily="18" charset="0"/>
+              </a:rPr>
+              <a:t>Categorize</a:t>
+            </a:r>
+          </a:p>
+          <a:p>
+            <a:r>
+              <a:rPr lang="en-US" sz="1200" dirty="0">
+                <a:latin typeface="Times New Roman" panose="02020603050405020304" pitchFamily="18" charset="0"/>
+                <a:cs typeface="Times New Roman" panose="02020603050405020304" pitchFamily="18" charset="0"/>
+              </a:rPr>
+              <a:t>Group biomarkers into category </a:t>
+            </a:r>
+            <a:r>
+              <a:rPr lang="en-US" sz="1200" dirty="0" err="1">
+                <a:latin typeface="Times New Roman" panose="02020603050405020304" pitchFamily="18" charset="0"/>
+                <a:cs typeface="Times New Roman" panose="02020603050405020304" pitchFamily="18" charset="0"/>
+              </a:rPr>
+              <a:t>C_k</a:t>
+            </a:r>
+            <a:endParaRPr lang="en-US" sz="1200" dirty="0">
+              <a:latin typeface="Times New Roman" panose="02020603050405020304" pitchFamily="18" charset="0"/>
+              <a:cs typeface="Times New Roman" panose="02020603050405020304" pitchFamily="18" charset="0"/>
+            </a:endParaRPr>
+          </a:p>
+        </p:txBody>
+      </p:sp>
+      <p:sp>
+        <p:nvSpPr>
+          <p:cNvPr id="17" name="TextBox 16">
+            <a:extLst>
+              <a:ext uri="{FF2B5EF4-FFF2-40B4-BE49-F238E27FC236}">
+                <a16:creationId xmlns:a16="http://schemas.microsoft.com/office/drawing/2014/main" id="{9E922AFE-335A-F020-6C46-40A9A3EB5A82}"/>
+              </a:ext>
+            </a:extLst>
+          </p:cNvPr>
+          <p:cNvSpPr txBox="1"/>
+          <p:nvPr/>
+        </p:nvSpPr>
+        <p:spPr>
+          <a:xfrm>
+            <a:off x="3792104" y="1175078"/>
+            <a:ext cx="948117" cy="261610"/>
+          </a:xfrm>
+          <a:prstGeom prst="rect">
+            <a:avLst/>
+          </a:prstGeom>
+          <a:noFill/>
+        </p:spPr>
+        <p:txBody>
+          <a:bodyPr wrap="square">
+            <a:spAutoFit/>
+          </a:bodyPr>
+          <a:lstStyle/>
+          <a:p>
+            <a:r>
+              <a:rPr lang="en-US" sz="1100" dirty="0">
+                <a:latin typeface="Times New Roman" panose="02020603050405020304" pitchFamily="18" charset="0"/>
+                <a:cs typeface="Times New Roman" panose="02020603050405020304" pitchFamily="18" charset="0"/>
+              </a:rPr>
+              <a:t>Categories</a:t>
+            </a:r>
+            <a:endParaRPr lang="en-US" sz="1200" dirty="0">
+              <a:latin typeface="Times New Roman" panose="02020603050405020304" pitchFamily="18" charset="0"/>
+              <a:cs typeface="Times New Roman" panose="02020603050405020304" pitchFamily="18" charset="0"/>
+            </a:endParaRPr>
+          </a:p>
+        </p:txBody>
+      </p:sp>
+      <p:sp>
+        <p:nvSpPr>
+          <p:cNvPr id="25" name="Rectangle 24">
+            <a:extLst>
+              <a:ext uri="{FF2B5EF4-FFF2-40B4-BE49-F238E27FC236}">
+                <a16:creationId xmlns:a16="http://schemas.microsoft.com/office/drawing/2014/main" id="{299F9712-FD63-16BB-824F-FB08F077E41A}"/>
+              </a:ext>
+            </a:extLst>
+          </p:cNvPr>
+          <p:cNvSpPr/>
+          <p:nvPr/>
+        </p:nvSpPr>
+        <p:spPr>
+          <a:xfrm>
+            <a:off x="7538744" y="1008740"/>
+            <a:ext cx="2023184" cy="825184"/>
+          </a:xfrm>
+          <a:prstGeom prst="rect">
+            <a:avLst/>
+          </a:prstGeom>
+        </p:spPr>
+        <p:style>
+          <a:lnRef idx="2">
+            <a:schemeClr val="dk1"/>
+          </a:lnRef>
+          <a:fillRef idx="1">
+            <a:schemeClr val="lt1"/>
+          </a:fillRef>
+          <a:effectRef idx="0">
+            <a:schemeClr val="dk1"/>
+          </a:effectRef>
+          <a:fontRef idx="minor">
+            <a:schemeClr val="dk1"/>
+          </a:fontRef>
+        </p:style>
+        <p:txBody>
+          <a:bodyPr rtlCol="0" anchor="ctr"/>
+          <a:lstStyle/>
+          <a:p>
+            <a:r>
+              <a:rPr lang="en-US" sz="1400" b="1" dirty="0">
+                <a:latin typeface="Times New Roman" panose="02020603050405020304" pitchFamily="18" charset="0"/>
+                <a:cs typeface="Times New Roman" panose="02020603050405020304" pitchFamily="18" charset="0"/>
+              </a:rPr>
+              <a:t>Graph construction</a:t>
+            </a:r>
+          </a:p>
+          <a:p>
+            <a:r>
+              <a:rPr lang="en-US" sz="1100" dirty="0">
+                <a:latin typeface="Times New Roman" panose="02020603050405020304" pitchFamily="18" charset="0"/>
+                <a:cs typeface="Times New Roman" panose="02020603050405020304" pitchFamily="18" charset="0"/>
+              </a:rPr>
+              <a:t> </a:t>
+            </a:r>
+            <a:r>
+              <a:rPr lang="en-US" sz="1200" dirty="0">
+                <a:latin typeface="Times New Roman" panose="02020603050405020304" pitchFamily="18" charset="0"/>
+                <a:cs typeface="Times New Roman" panose="02020603050405020304" pitchFamily="18" charset="0"/>
+              </a:rPr>
+              <a:t>Nodes = composite voxels.</a:t>
+            </a:r>
+          </a:p>
+          <a:p>
+            <a:r>
+              <a:rPr lang="en-US" sz="1200" dirty="0">
+                <a:latin typeface="Times New Roman" panose="02020603050405020304" pitchFamily="18" charset="0"/>
+                <a:cs typeface="Times New Roman" panose="02020603050405020304" pitchFamily="18" charset="0"/>
+              </a:rPr>
+              <a:t>Edge = link intra –inter nodes</a:t>
+            </a:r>
+          </a:p>
+        </p:txBody>
+      </p:sp>
+      <p:sp>
+        <p:nvSpPr>
+          <p:cNvPr id="26" name="TextBox 25">
+            <a:extLst>
+              <a:ext uri="{FF2B5EF4-FFF2-40B4-BE49-F238E27FC236}">
+                <a16:creationId xmlns:a16="http://schemas.microsoft.com/office/drawing/2014/main" id="{F5109058-FF86-151F-BC32-957A4AB83277}"/>
+              </a:ext>
+            </a:extLst>
+          </p:cNvPr>
+          <p:cNvSpPr txBox="1"/>
+          <p:nvPr/>
+        </p:nvSpPr>
+        <p:spPr>
+          <a:xfrm>
+            <a:off x="6105621" y="1144368"/>
+            <a:ext cx="1494186" cy="261610"/>
+          </a:xfrm>
+          <a:prstGeom prst="rect">
+            <a:avLst/>
+          </a:prstGeom>
+          <a:noFill/>
+        </p:spPr>
+        <p:txBody>
+          <a:bodyPr wrap="square">
+            <a:spAutoFit/>
+          </a:bodyPr>
+          <a:lstStyle/>
+          <a:p>
+            <a:r>
+              <a:rPr lang="en-US" sz="1100" dirty="0">
+                <a:latin typeface="Times New Roman" panose="02020603050405020304" pitchFamily="18" charset="0"/>
+                <a:cs typeface="Times New Roman" panose="02020603050405020304" pitchFamily="18" charset="0"/>
+              </a:rPr>
+              <a:t>S = {S1, S2, . . . , </a:t>
+            </a:r>
+            <a:r>
+              <a:rPr lang="en-US" sz="1100" dirty="0" err="1">
+                <a:latin typeface="Times New Roman" panose="02020603050405020304" pitchFamily="18" charset="0"/>
+                <a:cs typeface="Times New Roman" panose="02020603050405020304" pitchFamily="18" charset="0"/>
+              </a:rPr>
+              <a:t>Sm</a:t>
+            </a:r>
+            <a:r>
+              <a:rPr lang="en-US" sz="1100" dirty="0">
+                <a:latin typeface="Times New Roman" panose="02020603050405020304" pitchFamily="18" charset="0"/>
+                <a:cs typeface="Times New Roman" panose="02020603050405020304" pitchFamily="18" charset="0"/>
+              </a:rPr>
+              <a:t>}</a:t>
+            </a:r>
+            <a:endParaRPr lang="en-US" sz="900" dirty="0">
+              <a:latin typeface="Times New Roman" panose="02020603050405020304" pitchFamily="18" charset="0"/>
+              <a:cs typeface="Times New Roman" panose="02020603050405020304" pitchFamily="18" charset="0"/>
+            </a:endParaRPr>
+          </a:p>
+        </p:txBody>
+      </p:sp>
+      <p:sp>
+        <p:nvSpPr>
+          <p:cNvPr id="31" name="TextBox 30">
+            <a:extLst>
+              <a:ext uri="{FF2B5EF4-FFF2-40B4-BE49-F238E27FC236}">
+                <a16:creationId xmlns:a16="http://schemas.microsoft.com/office/drawing/2014/main" id="{0D9B11F7-5A15-EAAB-40A8-83469E430E4B}"/>
+              </a:ext>
+            </a:extLst>
+          </p:cNvPr>
+          <p:cNvSpPr txBox="1"/>
+          <p:nvPr/>
+        </p:nvSpPr>
+        <p:spPr>
+          <a:xfrm>
+            <a:off x="6173343" y="1429463"/>
+            <a:ext cx="1307488" cy="430887"/>
+          </a:xfrm>
+          <a:prstGeom prst="rect">
+            <a:avLst/>
+          </a:prstGeom>
+          <a:noFill/>
+        </p:spPr>
+        <p:txBody>
+          <a:bodyPr wrap="square">
+            <a:spAutoFit/>
+          </a:bodyPr>
+          <a:lstStyle/>
+          <a:p>
+            <a:r>
+              <a:rPr lang="en-US" sz="1100" dirty="0">
+                <a:latin typeface="Times New Roman" panose="02020603050405020304" pitchFamily="18" charset="0"/>
+                <a:cs typeface="Times New Roman" panose="02020603050405020304" pitchFamily="18" charset="0"/>
+              </a:rPr>
+              <a:t>Fi​=[xi​,</a:t>
+            </a:r>
+            <a:r>
+              <a:rPr lang="en-US" sz="1100" dirty="0" err="1">
+                <a:latin typeface="Times New Roman" panose="02020603050405020304" pitchFamily="18" charset="0"/>
+                <a:cs typeface="Times New Roman" panose="02020603050405020304" pitchFamily="18" charset="0"/>
+              </a:rPr>
+              <a:t>Ii</a:t>
+            </a:r>
+            <a:r>
+              <a:rPr lang="en-US" sz="1100" dirty="0">
+                <a:latin typeface="Times New Roman" panose="02020603050405020304" pitchFamily="18" charset="0"/>
+                <a:cs typeface="Times New Roman" panose="02020603050405020304" pitchFamily="18" charset="0"/>
+              </a:rPr>
+              <a:t>​,ci​]</a:t>
+            </a:r>
+          </a:p>
+          <a:p>
+            <a:r>
+              <a:rPr lang="en-US" sz="1100" dirty="0">
+                <a:latin typeface="Times New Roman" panose="02020603050405020304" pitchFamily="18" charset="0"/>
+                <a:cs typeface="Times New Roman" panose="02020603050405020304" pitchFamily="18" charset="0"/>
+              </a:rPr>
+              <a:t>Eᵢ = [xᵢ, wᵢ, ci] </a:t>
+            </a:r>
+          </a:p>
+        </p:txBody>
+      </p:sp>
+      <p:sp>
+        <p:nvSpPr>
+          <p:cNvPr id="37" name="Rectangle 36">
+            <a:extLst>
+              <a:ext uri="{FF2B5EF4-FFF2-40B4-BE49-F238E27FC236}">
+                <a16:creationId xmlns:a16="http://schemas.microsoft.com/office/drawing/2014/main" id="{DA854363-9805-3726-4624-95CA972FCA5C}"/>
+              </a:ext>
+            </a:extLst>
+          </p:cNvPr>
+          <p:cNvSpPr/>
+          <p:nvPr/>
+        </p:nvSpPr>
+        <p:spPr>
+          <a:xfrm>
+            <a:off x="10344912" y="1015587"/>
+            <a:ext cx="1664208" cy="818940"/>
+          </a:xfrm>
+          <a:prstGeom prst="rect">
+            <a:avLst/>
+          </a:prstGeom>
+        </p:spPr>
+        <p:style>
+          <a:lnRef idx="2">
+            <a:schemeClr val="dk1"/>
+          </a:lnRef>
+          <a:fillRef idx="1">
+            <a:schemeClr val="lt1"/>
+          </a:fillRef>
+          <a:effectRef idx="0">
+            <a:schemeClr val="dk1"/>
+          </a:effectRef>
+          <a:fontRef idx="minor">
+            <a:schemeClr val="dk1"/>
+          </a:fontRef>
+        </p:style>
+        <p:txBody>
+          <a:bodyPr rtlCol="0" anchor="ctr"/>
+          <a:lstStyle/>
+          <a:p>
+            <a:r>
+              <a:rPr lang="en-US" sz="1400" b="1" dirty="0">
+                <a:latin typeface="Times New Roman" panose="02020603050405020304" pitchFamily="18" charset="0"/>
+                <a:cs typeface="Times New Roman" panose="02020603050405020304" pitchFamily="18" charset="0"/>
+              </a:rPr>
+              <a:t>GAT forward</a:t>
+            </a:r>
+          </a:p>
+          <a:p>
+            <a:r>
+              <a:rPr lang="en-US" sz="1200" dirty="0">
+                <a:latin typeface="Times New Roman" panose="02020603050405020304" pitchFamily="18" charset="0"/>
+                <a:cs typeface="Times New Roman" panose="02020603050405020304" pitchFamily="18" charset="0"/>
+              </a:rPr>
+              <a:t> Compute node embeddings</a:t>
+            </a:r>
+          </a:p>
+        </p:txBody>
+      </p:sp>
+      <p:sp>
+        <p:nvSpPr>
+          <p:cNvPr id="62" name="Rectangle 61">
+            <a:extLst>
+              <a:ext uri="{FF2B5EF4-FFF2-40B4-BE49-F238E27FC236}">
+                <a16:creationId xmlns:a16="http://schemas.microsoft.com/office/drawing/2014/main" id="{CB1B0F9C-225D-6C14-D281-2204223F381C}"/>
+              </a:ext>
+            </a:extLst>
+          </p:cNvPr>
+          <p:cNvSpPr/>
+          <p:nvPr/>
+        </p:nvSpPr>
+        <p:spPr>
+          <a:xfrm>
+            <a:off x="55550" y="2981325"/>
+            <a:ext cx="1030728" cy="895350"/>
+          </a:xfrm>
+          <a:prstGeom prst="rect">
+            <a:avLst/>
+          </a:prstGeom>
+        </p:spPr>
+        <p:style>
+          <a:lnRef idx="2">
+            <a:schemeClr val="dk1"/>
+          </a:lnRef>
+          <a:fillRef idx="1">
+            <a:schemeClr val="lt1"/>
+          </a:fillRef>
+          <a:effectRef idx="0">
+            <a:schemeClr val="dk1"/>
+          </a:effectRef>
+          <a:fontRef idx="minor">
+            <a:schemeClr val="dk1"/>
+          </a:fontRef>
+        </p:style>
+        <p:txBody>
+          <a:bodyPr rtlCol="0" anchor="ctr"/>
+          <a:lstStyle/>
+          <a:p>
+            <a:r>
+              <a:rPr lang="en-US" sz="1300" b="1" dirty="0">
+                <a:latin typeface="Times New Roman" panose="02020603050405020304" pitchFamily="18" charset="0"/>
+                <a:cs typeface="Times New Roman" panose="02020603050405020304" pitchFamily="18" charset="0"/>
+              </a:rPr>
+              <a:t>Subgraph</a:t>
+            </a:r>
+          </a:p>
+          <a:p>
+            <a:r>
+              <a:rPr lang="en-US" sz="1300" b="1" dirty="0">
+                <a:latin typeface="Times New Roman" panose="02020603050405020304" pitchFamily="18" charset="0"/>
+                <a:cs typeface="Times New Roman" panose="02020603050405020304" pitchFamily="18" charset="0"/>
+              </a:rPr>
+              <a:t>preparation</a:t>
+            </a:r>
+          </a:p>
+          <a:p>
+            <a:r>
+              <a:rPr lang="pl-PL" sz="1100" dirty="0">
+                <a:latin typeface="Times New Roman" panose="02020603050405020304" pitchFamily="18" charset="0"/>
+                <a:cs typeface="Times New Roman" panose="02020603050405020304" pitchFamily="18" charset="0"/>
+              </a:rPr>
+              <a:t>s_i(k)</a:t>
+            </a:r>
+            <a:endParaRPr lang="en-US" sz="1100" dirty="0">
+              <a:latin typeface="Times New Roman" panose="02020603050405020304" pitchFamily="18" charset="0"/>
+              <a:cs typeface="Times New Roman" panose="02020603050405020304" pitchFamily="18" charset="0"/>
+            </a:endParaRPr>
           </a:p>
         </p:txBody>
       </p:sp>
       <p:cxnSp>
         <p:nvCxnSpPr>
-          <p:cNvPr id="6" name="Straight Arrow Connector 5">
-            <a:extLst>
-              <a:ext uri="{FF2B5EF4-FFF2-40B4-BE49-F238E27FC236}">
-                <a16:creationId xmlns:a16="http://schemas.microsoft.com/office/drawing/2014/main" id="{F8EBA6E7-7F6D-9693-01B2-20451B985C0C}"/>
+          <p:cNvPr id="66" name="Connector: Elbow 65">
+            <a:extLst>
+              <a:ext uri="{FF2B5EF4-FFF2-40B4-BE49-F238E27FC236}">
+                <a16:creationId xmlns:a16="http://schemas.microsoft.com/office/drawing/2014/main" id="{C7C76476-53FB-F16B-F120-C77D767192F1}"/>
               </a:ext>
             </a:extLst>
           </p:cNvPr>
           <p:cNvCxnSpPr>
             <a:cxnSpLocks/>
-            <a:stCxn id="4" idx="3"/>
-            <a:endCxn id="7" idx="1"/>
+            <a:stCxn id="37" idx="2"/>
+            <a:endCxn id="62" idx="0"/>
           </p:cNvCxnSpPr>
           <p:nvPr/>
         </p:nvCxnSpPr>
         <p:spPr>
-          <a:xfrm>
-            <a:off x="1609344" y="1469068"/>
-            <a:ext cx="594360" cy="0"/>
-          </a:xfrm>
-          <a:prstGeom prst="straightConnector1">
-            <a:avLst/>
+          <a:xfrm rot="5400000">
+            <a:off x="5300566" y="-2895125"/>
+            <a:ext cx="1146798" cy="10606102"/>
+          </a:xfrm>
+          <a:prstGeom prst="bentConnector3">
+            <a:avLst>
+              <a:gd name="adj1" fmla="val 43621"/>
+            </a:avLst>
           </a:prstGeom>
           <a:ln>
             <a:tailEnd type="triangle"/>
@@ -3513,10 +4034,83 @@
       </p:cxnSp>
       <p:sp>
         <p:nvSpPr>
-          <p:cNvPr id="7" name="Rectangle 6">
-            <a:extLst>
-              <a:ext uri="{FF2B5EF4-FFF2-40B4-BE49-F238E27FC236}">
-                <a16:creationId xmlns:a16="http://schemas.microsoft.com/office/drawing/2014/main" id="{42BA620E-636C-D9AD-20B0-C6EF444E251D}"/>
+          <p:cNvPr id="70" name="TextBox 69">
+            <a:extLst>
+              <a:ext uri="{FF2B5EF4-FFF2-40B4-BE49-F238E27FC236}">
+                <a16:creationId xmlns:a16="http://schemas.microsoft.com/office/drawing/2014/main" id="{F06DB7F5-E6CB-6179-5849-BE3833847C54}"/>
+              </a:ext>
+            </a:extLst>
+          </p:cNvPr>
+          <p:cNvSpPr txBox="1"/>
+          <p:nvPr/>
+        </p:nvSpPr>
+        <p:spPr>
+          <a:xfrm>
+            <a:off x="896112" y="2064381"/>
+            <a:ext cx="1493520" cy="276999"/>
+          </a:xfrm>
+          <a:prstGeom prst="rect">
+            <a:avLst/>
+          </a:prstGeom>
+          <a:noFill/>
+        </p:spPr>
+        <p:txBody>
+          <a:bodyPr wrap="square">
+            <a:spAutoFit/>
+          </a:bodyPr>
+          <a:lstStyle/>
+          <a:p>
+            <a:r>
+              <a:rPr lang="en-US" sz="1200" dirty="0" err="1">
+                <a:latin typeface="Times New Roman" panose="02020603050405020304" pitchFamily="18" charset="0"/>
+                <a:cs typeface="Times New Roman" panose="02020603050405020304" pitchFamily="18" charset="0"/>
+              </a:rPr>
+              <a:t>Z_i</a:t>
+            </a:r>
+            <a:r>
+              <a:rPr lang="en-US" sz="1200" dirty="0">
+                <a:latin typeface="Times New Roman" panose="02020603050405020304" pitchFamily="18" charset="0"/>
+                <a:cs typeface="Times New Roman" panose="02020603050405020304" pitchFamily="18" charset="0"/>
+              </a:rPr>
+              <a:t> = GAT(</a:t>
+            </a:r>
+            <a:r>
+              <a:rPr lang="en-US" sz="1200" dirty="0" err="1">
+                <a:latin typeface="Times New Roman" panose="02020603050405020304" pitchFamily="18" charset="0"/>
+                <a:cs typeface="Times New Roman" panose="02020603050405020304" pitchFamily="18" charset="0"/>
+              </a:rPr>
+              <a:t>F_i</a:t>
+            </a:r>
+            <a:r>
+              <a:rPr lang="en-US" sz="1200" dirty="0">
+                <a:latin typeface="Times New Roman" panose="02020603050405020304" pitchFamily="18" charset="0"/>
+                <a:cs typeface="Times New Roman" panose="02020603050405020304" pitchFamily="18" charset="0"/>
+              </a:rPr>
+              <a:t>, </a:t>
+            </a:r>
+            <a:r>
+              <a:rPr lang="en-US" sz="1200" dirty="0" err="1">
+                <a:latin typeface="Times New Roman" panose="02020603050405020304" pitchFamily="18" charset="0"/>
+                <a:cs typeface="Times New Roman" panose="02020603050405020304" pitchFamily="18" charset="0"/>
+              </a:rPr>
+              <a:t>E_i</a:t>
+            </a:r>
+            <a:r>
+              <a:rPr lang="en-US" sz="1200" dirty="0">
+                <a:latin typeface="Times New Roman" panose="02020603050405020304" pitchFamily="18" charset="0"/>
+                <a:cs typeface="Times New Roman" panose="02020603050405020304" pitchFamily="18" charset="0"/>
+              </a:rPr>
+              <a:t>) </a:t>
+            </a:r>
+          </a:p>
+        </p:txBody>
+      </p:sp>
+      <p:sp>
+        <p:nvSpPr>
+          <p:cNvPr id="78" name="Rectangle 77">
+            <a:extLst>
+              <a:ext uri="{FF2B5EF4-FFF2-40B4-BE49-F238E27FC236}">
+                <a16:creationId xmlns:a16="http://schemas.microsoft.com/office/drawing/2014/main" id="{9CC57157-270A-4793-6725-CC9FA51CDC2F}"/>
               </a:ext>
             </a:extLst>
           </p:cNvPr>
@@ -3525,8 +4119,8 @@
         </p:nvSpPr>
         <p:spPr>
           <a:xfrm>
-            <a:off x="2203704" y="1109853"/>
-            <a:ext cx="1600200" cy="718429"/>
+            <a:off x="3033949" y="2805376"/>
+            <a:ext cx="1900007" cy="546906"/>
           </a:xfrm>
           <a:prstGeom prst="rect">
             <a:avLst/>
@@ -3550,27 +4144,48 @@
           <a:bodyPr rtlCol="0" anchor="ctr"/>
           <a:lstStyle/>
           <a:p>
-            <a:pPr algn="ctr"/>
-            <a:r>
-              <a:rPr lang="en-US" sz="1400" b="1" dirty="0"/>
-              <a:t>Node Construction</a:t>
-            </a:r>
-          </a:p>
-          <a:p>
-            <a:pPr algn="ctr"/>
-            <a:r>
-              <a:rPr lang="en-US" sz="1100" dirty="0"/>
-              <a:t>Partition V into 3D supervoxels</a:t>
-            </a:r>
-          </a:p>
-        </p:txBody>
-      </p:sp>
-      <p:sp>
-        <p:nvSpPr>
-          <p:cNvPr id="11" name="Rectangle 10">
-            <a:extLst>
-              <a:ext uri="{FF2B5EF4-FFF2-40B4-BE49-F238E27FC236}">
-                <a16:creationId xmlns:a16="http://schemas.microsoft.com/office/drawing/2014/main" id="{48EE7798-9206-27AC-5586-B68DFC18AFF3}"/>
+            <a:r>
+              <a:rPr lang="en-US" sz="1400" b="1" dirty="0">
+                <a:latin typeface="Times New Roman" panose="02020603050405020304" pitchFamily="18" charset="0"/>
+                <a:cs typeface="Times New Roman" panose="02020603050405020304" pitchFamily="18" charset="0"/>
+              </a:rPr>
+              <a:t>Graph augmentation</a:t>
+            </a:r>
+          </a:p>
+          <a:p>
+            <a:r>
+              <a:rPr lang="en-US" sz="1200" dirty="0"/>
+              <a:t>G¹ and G²</a:t>
+            </a:r>
+            <a:endParaRPr lang="en-US" sz="1200" dirty="0">
+              <a:latin typeface="Times New Roman" panose="02020603050405020304" pitchFamily="18" charset="0"/>
+              <a:cs typeface="Times New Roman" panose="02020603050405020304" pitchFamily="18" charset="0"/>
+            </a:endParaRPr>
+          </a:p>
+          <a:p>
+            <a:r>
+              <a:rPr lang="pl-PL" sz="1200" dirty="0">
+                <a:latin typeface="Times New Roman" panose="02020603050405020304" pitchFamily="18" charset="0"/>
+                <a:cs typeface="Times New Roman" panose="02020603050405020304" pitchFamily="18" charset="0"/>
+              </a:rPr>
+              <a:t>Mask nodes/</a:t>
+            </a:r>
+            <a:r>
+              <a:rPr lang="en-US" sz="1200" dirty="0">
+                <a:latin typeface="Times New Roman" panose="02020603050405020304" pitchFamily="18" charset="0"/>
+                <a:cs typeface="Times New Roman" panose="02020603050405020304" pitchFamily="18" charset="0"/>
+              </a:rPr>
+              <a:t> Drop edges</a:t>
+            </a:r>
+          </a:p>
+        </p:txBody>
+      </p:sp>
+      <p:sp>
+        <p:nvSpPr>
+          <p:cNvPr id="79" name="Rectangle 78">
+            <a:extLst>
+              <a:ext uri="{FF2B5EF4-FFF2-40B4-BE49-F238E27FC236}">
+                <a16:creationId xmlns:a16="http://schemas.microsoft.com/office/drawing/2014/main" id="{A75C79FE-2582-1658-2CFA-29433A94F05A}"/>
               </a:ext>
             </a:extLst>
           </p:cNvPr>
@@ -3579,8 +4194,8 @@
         </p:nvSpPr>
         <p:spPr>
           <a:xfrm>
-            <a:off x="4992624" y="1109853"/>
-            <a:ext cx="1600200" cy="724674"/>
+            <a:off x="2965945" y="3611919"/>
+            <a:ext cx="1971190" cy="546906"/>
           </a:xfrm>
           <a:prstGeom prst="rect">
             <a:avLst/>
@@ -3604,49 +4219,149 @@
           <a:bodyPr rtlCol="0" anchor="ctr"/>
           <a:lstStyle/>
           <a:p>
-            <a:pPr algn="ctr"/>
-            <a:r>
-              <a:rPr lang="en-US" sz="1400" b="1" dirty="0"/>
-              <a:t>Category Embedding</a:t>
-            </a:r>
-          </a:p>
-          <a:p>
-            <a:pPr algn="ctr"/>
-            <a:r>
-              <a:rPr lang="en-US" sz="1100" dirty="0"/>
-              <a:t>Group biomarkers into categories </a:t>
-            </a:r>
-            <a:r>
-              <a:rPr lang="en-US" sz="1100" dirty="0" err="1"/>
-              <a:t>C_k</a:t>
-            </a:r>
-            <a:endParaRPr lang="en-US" sz="1100" dirty="0"/>
+            <a:r>
+              <a:rPr lang="en-US" sz="1400" b="1" dirty="0">
+                <a:latin typeface="Times New Roman" panose="02020603050405020304" pitchFamily="18" charset="0"/>
+                <a:cs typeface="Times New Roman" panose="02020603050405020304" pitchFamily="18" charset="0"/>
+              </a:rPr>
+              <a:t>Self-supervised loss </a:t>
+            </a:r>
+            <a:r>
+              <a:rPr lang="pl-PL" sz="1200" dirty="0">
+                <a:latin typeface="Times New Roman" panose="02020603050405020304" pitchFamily="18" charset="0"/>
+                <a:cs typeface="Times New Roman" panose="02020603050405020304" pitchFamily="18" charset="0"/>
+              </a:rPr>
+              <a:t>L_contrast</a:t>
+            </a:r>
+            <a:r>
+              <a:rPr lang="en-US" sz="1200" dirty="0">
+                <a:latin typeface="Times New Roman" panose="02020603050405020304" pitchFamily="18" charset="0"/>
+                <a:cs typeface="Times New Roman" panose="02020603050405020304" pitchFamily="18" charset="0"/>
+              </a:rPr>
+              <a:t>+</a:t>
+            </a:r>
+            <a:r>
+              <a:rPr lang="en-US" sz="1200" dirty="0" err="1">
+                <a:latin typeface="Times New Roman" panose="02020603050405020304" pitchFamily="18" charset="0"/>
+                <a:cs typeface="Times New Roman" panose="02020603050405020304" pitchFamily="18" charset="0"/>
+              </a:rPr>
+              <a:t>L_mask</a:t>
+            </a:r>
+            <a:r>
+              <a:rPr lang="en-US" sz="1200" dirty="0">
+                <a:latin typeface="Times New Roman" panose="02020603050405020304" pitchFamily="18" charset="0"/>
+                <a:cs typeface="Times New Roman" panose="02020603050405020304" pitchFamily="18" charset="0"/>
+              </a:rPr>
+              <a:t> + </a:t>
+            </a:r>
+            <a:r>
+              <a:rPr lang="en-US" sz="1200" dirty="0" err="1">
+                <a:latin typeface="Times New Roman" panose="02020603050405020304" pitchFamily="18" charset="0"/>
+                <a:cs typeface="Times New Roman" panose="02020603050405020304" pitchFamily="18" charset="0"/>
+              </a:rPr>
+              <a:t>L_dist</a:t>
+            </a:r>
+            <a:r>
+              <a:rPr lang="en-US" sz="1200" dirty="0">
+                <a:latin typeface="Times New Roman" panose="02020603050405020304" pitchFamily="18" charset="0"/>
+                <a:cs typeface="Times New Roman" panose="02020603050405020304" pitchFamily="18" charset="0"/>
+              </a:rPr>
+              <a:t> </a:t>
+            </a:r>
+            <a:endParaRPr lang="en-US" sz="1100" dirty="0">
+              <a:latin typeface="Times New Roman" panose="02020603050405020304" pitchFamily="18" charset="0"/>
+              <a:cs typeface="Times New Roman" panose="02020603050405020304" pitchFamily="18" charset="0"/>
+            </a:endParaRPr>
+          </a:p>
+        </p:txBody>
+      </p:sp>
+      <p:sp>
+        <p:nvSpPr>
+          <p:cNvPr id="80" name="Rectangle 79">
+            <a:extLst>
+              <a:ext uri="{FF2B5EF4-FFF2-40B4-BE49-F238E27FC236}">
+                <a16:creationId xmlns:a16="http://schemas.microsoft.com/office/drawing/2014/main" id="{56528126-D06E-DCA0-8DB5-092BE7677A9C}"/>
+              </a:ext>
+            </a:extLst>
+          </p:cNvPr>
+          <p:cNvSpPr/>
+          <p:nvPr/>
+        </p:nvSpPr>
+        <p:spPr>
+          <a:xfrm>
+            <a:off x="3033948" y="4418462"/>
+            <a:ext cx="1900005" cy="439357"/>
+          </a:xfrm>
+          <a:prstGeom prst="rect">
+            <a:avLst/>
+          </a:prstGeom>
+        </p:spPr>
+        <p:style>
+          <a:lnRef idx="2">
+            <a:schemeClr val="dk1"/>
+          </a:lnRef>
+          <a:fillRef idx="1">
+            <a:schemeClr val="lt1"/>
+          </a:fillRef>
+          <a:effectRef idx="0">
+            <a:schemeClr val="dk1"/>
+          </a:effectRef>
+          <a:fontRef idx="minor">
+            <a:schemeClr val="dk1"/>
+          </a:fontRef>
+        </p:style>
+        <p:txBody>
+          <a:bodyPr rtlCol="0" anchor="ctr"/>
+          <a:lstStyle/>
+          <a:p>
+            <a:r>
+              <a:rPr lang="en-US" sz="1400" b="1" dirty="0">
+                <a:latin typeface="Times New Roman" panose="02020603050405020304" pitchFamily="18" charset="0"/>
+                <a:cs typeface="Times New Roman" panose="02020603050405020304" pitchFamily="18" charset="0"/>
+              </a:rPr>
+              <a:t>Backpropagation</a:t>
+            </a:r>
+          </a:p>
+          <a:p>
+            <a:r>
+              <a:rPr lang="el-GR" sz="1200" dirty="0">
+                <a:latin typeface="Times New Roman" panose="02020603050405020304" pitchFamily="18" charset="0"/>
+                <a:cs typeface="Times New Roman" panose="02020603050405020304" pitchFamily="18" charset="0"/>
+              </a:rPr>
+              <a:t>θ ← θ − η ∇θ</a:t>
+            </a:r>
+            <a:endParaRPr lang="en-US" sz="1200" dirty="0">
+              <a:latin typeface="Times New Roman" panose="02020603050405020304" pitchFamily="18" charset="0"/>
+              <a:cs typeface="Times New Roman" panose="02020603050405020304" pitchFamily="18" charset="0"/>
+            </a:endParaRPr>
           </a:p>
         </p:txBody>
       </p:sp>
       <p:cxnSp>
         <p:nvCxnSpPr>
-          <p:cNvPr id="12" name="Straight Arrow Connector 11">
-            <a:extLst>
-              <a:ext uri="{FF2B5EF4-FFF2-40B4-BE49-F238E27FC236}">
-                <a16:creationId xmlns:a16="http://schemas.microsoft.com/office/drawing/2014/main" id="{786E7706-0108-4E8A-FDA9-9B79643D7868}"/>
+          <p:cNvPr id="82" name="Connector: Elbow 81">
+            <a:extLst>
+              <a:ext uri="{FF2B5EF4-FFF2-40B4-BE49-F238E27FC236}">
+                <a16:creationId xmlns:a16="http://schemas.microsoft.com/office/drawing/2014/main" id="{FE429611-EAD5-81B2-55FA-E331E40EB9DD}"/>
               </a:ext>
             </a:extLst>
           </p:cNvPr>
           <p:cNvCxnSpPr>
             <a:cxnSpLocks/>
-            <a:stCxn id="7" idx="3"/>
-            <a:endCxn id="11" idx="1"/>
+            <a:stCxn id="80" idx="1"/>
+            <a:endCxn id="78" idx="1"/>
           </p:cNvCxnSpPr>
           <p:nvPr/>
         </p:nvCxnSpPr>
         <p:spPr>
-          <a:xfrm>
-            <a:off x="3803904" y="1469068"/>
-            <a:ext cx="1188720" cy="3122"/>
-          </a:xfrm>
-          <a:prstGeom prst="straightConnector1">
-            <a:avLst/>
+          <a:xfrm rot="10800000" flipH="1">
+            <a:off x="3033947" y="3078829"/>
+            <a:ext cx="1" cy="1559312"/>
+          </a:xfrm>
+          <a:prstGeom prst="bentConnector3">
+            <a:avLst>
+              <a:gd name="adj1" fmla="val -22860000000"/>
+            </a:avLst>
           </a:prstGeom>
           <a:ln>
             <a:tailEnd type="triangle"/>
@@ -3669,10 +4384,10 @@
       </p:cxnSp>
       <p:sp>
         <p:nvSpPr>
-          <p:cNvPr id="17" name="TextBox 16">
-            <a:extLst>
-              <a:ext uri="{FF2B5EF4-FFF2-40B4-BE49-F238E27FC236}">
-                <a16:creationId xmlns:a16="http://schemas.microsoft.com/office/drawing/2014/main" id="{9E922AFE-335A-F020-6C46-40A9A3EB5A82}"/>
+          <p:cNvPr id="85" name="TextBox 84">
+            <a:extLst>
+              <a:ext uri="{FF2B5EF4-FFF2-40B4-BE49-F238E27FC236}">
+                <a16:creationId xmlns:a16="http://schemas.microsoft.com/office/drawing/2014/main" id="{42F158A9-6D47-3E14-E95D-648CAD1DDDAE}"/>
               </a:ext>
             </a:extLst>
           </p:cNvPr>
@@ -3680,9 +4395,9 @@
           <p:nvPr/>
         </p:nvSpPr>
         <p:spPr>
-          <a:xfrm>
-            <a:off x="3886390" y="1263740"/>
-            <a:ext cx="747522" cy="276999"/>
+          <a:xfrm rot="16200000">
+            <a:off x="1679703" y="3717002"/>
+            <a:ext cx="1973856" cy="307777"/>
           </a:xfrm>
           <a:prstGeom prst="rect">
             <a:avLst/>
@@ -3696,887 +4411,10 @@
           <a:lstStyle/>
           <a:p>
             <a:r>
-              <a:rPr lang="en-US" sz="1200" dirty="0"/>
-              <a:t>Node </a:t>
-            </a:r>
-            <a:r>
-              <a:rPr lang="en-US" sz="1200" dirty="0" err="1"/>
-              <a:t>i</a:t>
-            </a:r>
-            <a:endParaRPr lang="en-US" sz="1200" dirty="0"/>
-          </a:p>
-        </p:txBody>
-      </p:sp>
-      <p:sp>
-        <p:nvSpPr>
-          <p:cNvPr id="20" name="TextBox 19">
-            <a:extLst>
-              <a:ext uri="{FF2B5EF4-FFF2-40B4-BE49-F238E27FC236}">
-                <a16:creationId xmlns:a16="http://schemas.microsoft.com/office/drawing/2014/main" id="{584C40F3-76A2-C86A-4D6D-40D3D6063C0D}"/>
-              </a:ext>
-            </a:extLst>
-          </p:cNvPr>
-          <p:cNvSpPr txBox="1"/>
-          <p:nvPr/>
-        </p:nvSpPr>
-        <p:spPr>
-          <a:xfrm>
-            <a:off x="3837432" y="1475232"/>
-            <a:ext cx="1121664" cy="261610"/>
-          </a:xfrm>
-          <a:prstGeom prst="rect">
-            <a:avLst/>
-          </a:prstGeom>
-          <a:noFill/>
-        </p:spPr>
-        <p:txBody>
-          <a:bodyPr wrap="square">
-            <a:spAutoFit/>
-          </a:bodyPr>
-          <a:lstStyle/>
-          <a:p>
-            <a:r>
-              <a:rPr lang="en-US" sz="1100" dirty="0"/>
-              <a:t>centroid </a:t>
-            </a:r>
-            <a:r>
-              <a:rPr lang="en-US" sz="1100" dirty="0" err="1"/>
-              <a:t>X_i</a:t>
-            </a:r>
-            <a:endParaRPr lang="en-US" sz="1100" dirty="0"/>
-          </a:p>
-        </p:txBody>
-      </p:sp>
-      <p:sp>
-        <p:nvSpPr>
-          <p:cNvPr id="22" name="TextBox 21">
-            <a:extLst>
-              <a:ext uri="{FF2B5EF4-FFF2-40B4-BE49-F238E27FC236}">
-                <a16:creationId xmlns:a16="http://schemas.microsoft.com/office/drawing/2014/main" id="{F99BC0B9-7878-9A71-1F09-8DC7F8D2F6C3}"/>
-              </a:ext>
-            </a:extLst>
-          </p:cNvPr>
-          <p:cNvSpPr txBox="1"/>
-          <p:nvPr/>
-        </p:nvSpPr>
-        <p:spPr>
-          <a:xfrm>
-            <a:off x="3837432" y="1656759"/>
-            <a:ext cx="1121664" cy="261610"/>
-          </a:xfrm>
-          <a:prstGeom prst="rect">
-            <a:avLst/>
-          </a:prstGeom>
-          <a:noFill/>
-        </p:spPr>
-        <p:txBody>
-          <a:bodyPr wrap="square">
-            <a:spAutoFit/>
-          </a:bodyPr>
-          <a:lstStyle/>
-          <a:p>
-            <a:r>
-              <a:rPr lang="en-US" sz="1100" dirty="0"/>
-              <a:t>features </a:t>
-            </a:r>
-            <a:r>
-              <a:rPr lang="en-US" sz="1100" dirty="0" err="1"/>
-              <a:t>F_i</a:t>
-            </a:r>
-            <a:r>
-              <a:rPr lang="en-US" sz="1100" dirty="0"/>
-              <a:t> </a:t>
-            </a:r>
-          </a:p>
-        </p:txBody>
-      </p:sp>
-      <p:sp>
-        <p:nvSpPr>
-          <p:cNvPr id="25" name="Rectangle 24">
-            <a:extLst>
-              <a:ext uri="{FF2B5EF4-FFF2-40B4-BE49-F238E27FC236}">
-                <a16:creationId xmlns:a16="http://schemas.microsoft.com/office/drawing/2014/main" id="{299F9712-FD63-16BB-824F-FB08F077E41A}"/>
-              </a:ext>
-            </a:extLst>
-          </p:cNvPr>
-          <p:cNvSpPr/>
-          <p:nvPr/>
-        </p:nvSpPr>
-        <p:spPr>
-          <a:xfrm>
-            <a:off x="7781544" y="1109853"/>
-            <a:ext cx="1664208" cy="724674"/>
-          </a:xfrm>
-          <a:prstGeom prst="rect">
-            <a:avLst/>
-          </a:prstGeom>
-        </p:spPr>
-        <p:style>
-          <a:lnRef idx="2">
-            <a:schemeClr val="dk1"/>
-          </a:lnRef>
-          <a:fillRef idx="1">
-            <a:schemeClr val="lt1"/>
-          </a:fillRef>
-          <a:effectRef idx="0">
-            <a:schemeClr val="dk1"/>
-          </a:effectRef>
-          <a:fontRef idx="minor">
-            <a:schemeClr val="dk1"/>
-          </a:fontRef>
-        </p:style>
-        <p:txBody>
-          <a:bodyPr rtlCol="0" anchor="ctr"/>
-          <a:lstStyle/>
-          <a:p>
-            <a:pPr algn="ctr"/>
-            <a:r>
-              <a:rPr lang="en-US" sz="1400" b="1" dirty="0"/>
-              <a:t>Graph Construction</a:t>
-            </a:r>
-          </a:p>
-          <a:p>
-            <a:pPr algn="ctr"/>
-            <a:r>
-              <a:rPr lang="en-US" sz="1100" dirty="0"/>
-              <a:t> Nodes = supervoxels.</a:t>
-            </a:r>
-          </a:p>
-          <a:p>
-            <a:pPr algn="ctr"/>
-            <a:r>
-              <a:rPr lang="en-US" sz="1100" dirty="0"/>
-              <a:t>Edge (</a:t>
-            </a:r>
-            <a:r>
-              <a:rPr lang="en-US" sz="1100" dirty="0" err="1"/>
-              <a:t>i,j</a:t>
-            </a:r>
-            <a:r>
-              <a:rPr lang="en-US" sz="1100" dirty="0"/>
-              <a:t>) if ||</a:t>
-            </a:r>
-            <a:r>
-              <a:rPr lang="en-US" sz="1100" dirty="0" err="1"/>
-              <a:t>X_i</a:t>
-            </a:r>
-            <a:r>
-              <a:rPr lang="en-US" sz="1100" dirty="0"/>
-              <a:t> − </a:t>
-            </a:r>
-            <a:r>
-              <a:rPr lang="en-US" sz="1100" dirty="0" err="1"/>
-              <a:t>X_j</a:t>
-            </a:r>
-            <a:r>
-              <a:rPr lang="en-US" sz="1100" dirty="0"/>
-              <a:t>|| ≤ r</a:t>
-            </a:r>
-          </a:p>
-        </p:txBody>
-      </p:sp>
-      <p:sp>
-        <p:nvSpPr>
-          <p:cNvPr id="26" name="TextBox 25">
-            <a:extLst>
-              <a:ext uri="{FF2B5EF4-FFF2-40B4-BE49-F238E27FC236}">
-                <a16:creationId xmlns:a16="http://schemas.microsoft.com/office/drawing/2014/main" id="{F5109058-FF86-151F-BC32-957A4AB83277}"/>
-              </a:ext>
-            </a:extLst>
-          </p:cNvPr>
-          <p:cNvSpPr txBox="1"/>
-          <p:nvPr/>
-        </p:nvSpPr>
-        <p:spPr>
-          <a:xfrm>
-            <a:off x="6626352" y="1263741"/>
-            <a:ext cx="1188720" cy="276999"/>
-          </a:xfrm>
-          <a:prstGeom prst="rect">
-            <a:avLst/>
-          </a:prstGeom>
-          <a:noFill/>
-        </p:spPr>
-        <p:txBody>
-          <a:bodyPr wrap="square">
-            <a:spAutoFit/>
-          </a:bodyPr>
-          <a:lstStyle/>
-          <a:p>
-            <a:r>
-              <a:rPr lang="en-US" sz="1200" dirty="0"/>
-              <a:t>Pool channels</a:t>
-            </a:r>
-          </a:p>
-        </p:txBody>
-      </p:sp>
-      <p:cxnSp>
-        <p:nvCxnSpPr>
-          <p:cNvPr id="29" name="Straight Arrow Connector 28">
-            <a:extLst>
-              <a:ext uri="{FF2B5EF4-FFF2-40B4-BE49-F238E27FC236}">
-                <a16:creationId xmlns:a16="http://schemas.microsoft.com/office/drawing/2014/main" id="{866611A3-8677-401A-8702-44878A799AD3}"/>
-              </a:ext>
-            </a:extLst>
-          </p:cNvPr>
-          <p:cNvCxnSpPr>
-            <a:cxnSpLocks/>
-          </p:cNvCxnSpPr>
-          <p:nvPr/>
-        </p:nvCxnSpPr>
-        <p:spPr>
-          <a:xfrm>
-            <a:off x="6592824" y="1520952"/>
-            <a:ext cx="1188720" cy="0"/>
-          </a:xfrm>
-          <a:prstGeom prst="straightConnector1">
-            <a:avLst/>
-          </a:prstGeom>
-          <a:ln>
-            <a:tailEnd type="triangle"/>
-          </a:ln>
-        </p:spPr>
-        <p:style>
-          <a:lnRef idx="2">
-            <a:schemeClr val="accent1"/>
-          </a:lnRef>
-          <a:fillRef idx="0">
-            <a:schemeClr val="accent1"/>
-          </a:fillRef>
-          <a:effectRef idx="1">
-            <a:schemeClr val="accent1"/>
-          </a:effectRef>
-          <a:fontRef idx="minor">
-            <a:schemeClr val="tx1"/>
-          </a:fontRef>
-        </p:style>
-      </p:cxnSp>
-      <p:sp>
-        <p:nvSpPr>
-          <p:cNvPr id="31" name="TextBox 30">
-            <a:extLst>
-              <a:ext uri="{FF2B5EF4-FFF2-40B4-BE49-F238E27FC236}">
-                <a16:creationId xmlns:a16="http://schemas.microsoft.com/office/drawing/2014/main" id="{0D9B11F7-5A15-EAAB-40A8-83469E430E4B}"/>
-              </a:ext>
-            </a:extLst>
-          </p:cNvPr>
-          <p:cNvSpPr txBox="1"/>
-          <p:nvPr/>
-        </p:nvSpPr>
-        <p:spPr>
-          <a:xfrm>
-            <a:off x="6718935" y="1561354"/>
-            <a:ext cx="1003554" cy="261610"/>
-          </a:xfrm>
-          <a:prstGeom prst="rect">
-            <a:avLst/>
-          </a:prstGeom>
-          <a:noFill/>
-        </p:spPr>
-        <p:txBody>
-          <a:bodyPr wrap="square">
-            <a:spAutoFit/>
-          </a:bodyPr>
-          <a:lstStyle/>
-          <a:p>
-            <a:r>
-              <a:rPr lang="en-US" sz="1100" dirty="0"/>
-              <a:t> </a:t>
-            </a:r>
-            <a:r>
-              <a:rPr lang="en-US" sz="1100" dirty="0" err="1"/>
-              <a:t>F_i</a:t>
-            </a:r>
-            <a:r>
-              <a:rPr lang="en-US" sz="1100" dirty="0"/>
-              <a:t> = {</a:t>
-            </a:r>
-            <a:r>
-              <a:rPr lang="en-US" sz="1100" dirty="0" err="1"/>
-              <a:t>F_i</a:t>
-            </a:r>
-            <a:r>
-              <a:rPr lang="en-US" sz="1100" dirty="0"/>
-              <a:t>(k)}</a:t>
-            </a:r>
-          </a:p>
-        </p:txBody>
-      </p:sp>
-      <p:sp>
-        <p:nvSpPr>
-          <p:cNvPr id="32" name="TextBox 31">
-            <a:extLst>
-              <a:ext uri="{FF2B5EF4-FFF2-40B4-BE49-F238E27FC236}">
-                <a16:creationId xmlns:a16="http://schemas.microsoft.com/office/drawing/2014/main" id="{08808D2F-346B-4E2C-D1AA-71B602C03DCC}"/>
-              </a:ext>
-            </a:extLst>
-          </p:cNvPr>
-          <p:cNvSpPr txBox="1"/>
-          <p:nvPr/>
-        </p:nvSpPr>
-        <p:spPr>
-          <a:xfrm>
-            <a:off x="9486519" y="1238016"/>
-            <a:ext cx="800481" cy="276999"/>
-          </a:xfrm>
-          <a:prstGeom prst="rect">
-            <a:avLst/>
-          </a:prstGeom>
-          <a:noFill/>
-        </p:spPr>
-        <p:txBody>
-          <a:bodyPr wrap="square">
-            <a:spAutoFit/>
-          </a:bodyPr>
-          <a:lstStyle/>
-          <a:p>
-            <a:r>
-              <a:rPr lang="en-US" sz="1200" dirty="0"/>
-              <a:t>Nodes</a:t>
-            </a:r>
-          </a:p>
-        </p:txBody>
-      </p:sp>
-      <p:cxnSp>
-        <p:nvCxnSpPr>
-          <p:cNvPr id="33" name="Straight Arrow Connector 32">
-            <a:extLst>
-              <a:ext uri="{FF2B5EF4-FFF2-40B4-BE49-F238E27FC236}">
-                <a16:creationId xmlns:a16="http://schemas.microsoft.com/office/drawing/2014/main" id="{6FD4E48B-3658-F132-1673-6112152551AE}"/>
-              </a:ext>
-            </a:extLst>
-          </p:cNvPr>
-          <p:cNvCxnSpPr>
-            <a:cxnSpLocks/>
-          </p:cNvCxnSpPr>
-          <p:nvPr/>
-        </p:nvCxnSpPr>
-        <p:spPr>
-          <a:xfrm flipV="1">
-            <a:off x="9452991" y="1530096"/>
-            <a:ext cx="898017" cy="5318"/>
-          </a:xfrm>
-          <a:prstGeom prst="straightConnector1">
-            <a:avLst/>
-          </a:prstGeom>
-          <a:ln>
-            <a:tailEnd type="triangle"/>
-          </a:ln>
-        </p:spPr>
-        <p:style>
-          <a:lnRef idx="2">
-            <a:schemeClr val="accent1"/>
-          </a:lnRef>
-          <a:fillRef idx="0">
-            <a:schemeClr val="accent1"/>
-          </a:fillRef>
-          <a:effectRef idx="1">
-            <a:schemeClr val="accent1"/>
-          </a:effectRef>
-          <a:fontRef idx="minor">
-            <a:schemeClr val="tx1"/>
-          </a:fontRef>
-        </p:style>
-      </p:cxnSp>
-      <p:sp>
-        <p:nvSpPr>
-          <p:cNvPr id="34" name="TextBox 33">
-            <a:extLst>
-              <a:ext uri="{FF2B5EF4-FFF2-40B4-BE49-F238E27FC236}">
-                <a16:creationId xmlns:a16="http://schemas.microsoft.com/office/drawing/2014/main" id="{D8E58414-BD9E-5EDD-4E57-9A6E90A43A0D}"/>
-              </a:ext>
-            </a:extLst>
-          </p:cNvPr>
-          <p:cNvSpPr txBox="1"/>
-          <p:nvPr/>
-        </p:nvSpPr>
-        <p:spPr>
-          <a:xfrm>
-            <a:off x="9486519" y="1557528"/>
-            <a:ext cx="634746" cy="276999"/>
-          </a:xfrm>
-          <a:prstGeom prst="rect">
-            <a:avLst/>
-          </a:prstGeom>
-          <a:noFill/>
-        </p:spPr>
-        <p:txBody>
-          <a:bodyPr wrap="square">
-            <a:spAutoFit/>
-          </a:bodyPr>
-          <a:lstStyle/>
-          <a:p>
-            <a:r>
-              <a:rPr lang="en-US" sz="1200" dirty="0"/>
-              <a:t>Edges</a:t>
-            </a:r>
-          </a:p>
-        </p:txBody>
-      </p:sp>
-      <p:sp>
-        <p:nvSpPr>
-          <p:cNvPr id="37" name="Rectangle 36">
-            <a:extLst>
-              <a:ext uri="{FF2B5EF4-FFF2-40B4-BE49-F238E27FC236}">
-                <a16:creationId xmlns:a16="http://schemas.microsoft.com/office/drawing/2014/main" id="{DA854363-9805-3726-4624-95CA972FCA5C}"/>
-              </a:ext>
-            </a:extLst>
-          </p:cNvPr>
-          <p:cNvSpPr/>
-          <p:nvPr/>
-        </p:nvSpPr>
-        <p:spPr>
-          <a:xfrm>
-            <a:off x="10344912" y="1109853"/>
-            <a:ext cx="1664208" cy="724674"/>
-          </a:xfrm>
-          <a:prstGeom prst="rect">
-            <a:avLst/>
-          </a:prstGeom>
-        </p:spPr>
-        <p:style>
-          <a:lnRef idx="2">
-            <a:schemeClr val="dk1"/>
-          </a:lnRef>
-          <a:fillRef idx="1">
-            <a:schemeClr val="lt1"/>
-          </a:fillRef>
-          <a:effectRef idx="0">
-            <a:schemeClr val="dk1"/>
-          </a:effectRef>
-          <a:fontRef idx="minor">
-            <a:schemeClr val="dk1"/>
-          </a:fontRef>
-        </p:style>
-        <p:txBody>
-          <a:bodyPr rtlCol="0" anchor="ctr"/>
-          <a:lstStyle/>
-          <a:p>
-            <a:pPr algn="ctr"/>
-            <a:r>
-              <a:rPr lang="en-US" sz="1400" b="1" dirty="0"/>
-              <a:t>GAT Forward</a:t>
-            </a:r>
-          </a:p>
-          <a:p>
-            <a:pPr algn="ctr"/>
-            <a:r>
-              <a:rPr lang="en-US" sz="1100" dirty="0"/>
-              <a:t> Compute node embeddings</a:t>
-            </a:r>
-          </a:p>
-        </p:txBody>
-      </p:sp>
-      <p:sp>
-        <p:nvSpPr>
-          <p:cNvPr id="62" name="Rectangle 61">
-            <a:extLst>
-              <a:ext uri="{FF2B5EF4-FFF2-40B4-BE49-F238E27FC236}">
-                <a16:creationId xmlns:a16="http://schemas.microsoft.com/office/drawing/2014/main" id="{CB1B0F9C-225D-6C14-D281-2204223F381C}"/>
-              </a:ext>
-            </a:extLst>
-          </p:cNvPr>
-          <p:cNvSpPr/>
-          <p:nvPr/>
-        </p:nvSpPr>
-        <p:spPr>
-          <a:xfrm>
-            <a:off x="182880" y="2981325"/>
-            <a:ext cx="1426464" cy="895350"/>
-          </a:xfrm>
-          <a:prstGeom prst="rect">
-            <a:avLst/>
-          </a:prstGeom>
-        </p:spPr>
-        <p:style>
-          <a:lnRef idx="2">
-            <a:schemeClr val="dk1"/>
-          </a:lnRef>
-          <a:fillRef idx="1">
-            <a:schemeClr val="lt1"/>
-          </a:fillRef>
-          <a:effectRef idx="0">
-            <a:schemeClr val="dk1"/>
-          </a:effectRef>
-          <a:fontRef idx="minor">
-            <a:schemeClr val="dk1"/>
-          </a:fontRef>
-        </p:style>
-        <p:txBody>
-          <a:bodyPr rtlCol="0" anchor="ctr"/>
-          <a:lstStyle/>
-          <a:p>
-            <a:pPr algn="ctr"/>
-            <a:r>
-              <a:rPr lang="en-US" sz="1400" b="1" dirty="0"/>
-              <a:t>Saliency Estimation </a:t>
-            </a:r>
-          </a:p>
-          <a:p>
-            <a:pPr algn="ctr"/>
-            <a:r>
-              <a:rPr lang="pl-PL" sz="1100" dirty="0"/>
-              <a:t>s_i(k) = σ(w_kᵀ Z_i)</a:t>
-            </a:r>
-            <a:endParaRPr lang="en-US" sz="1100" dirty="0"/>
-          </a:p>
-        </p:txBody>
-      </p:sp>
-      <p:cxnSp>
-        <p:nvCxnSpPr>
-          <p:cNvPr id="66" name="Connector: Elbow 65">
-            <a:extLst>
-              <a:ext uri="{FF2B5EF4-FFF2-40B4-BE49-F238E27FC236}">
-                <a16:creationId xmlns:a16="http://schemas.microsoft.com/office/drawing/2014/main" id="{C7C76476-53FB-F16B-F120-C77D767192F1}"/>
-              </a:ext>
-            </a:extLst>
-          </p:cNvPr>
-          <p:cNvCxnSpPr>
-            <a:cxnSpLocks/>
-            <a:stCxn id="37" idx="2"/>
-            <a:endCxn id="62" idx="0"/>
-          </p:cNvCxnSpPr>
-          <p:nvPr/>
-        </p:nvCxnSpPr>
-        <p:spPr>
-          <a:xfrm rot="5400000">
-            <a:off x="5463165" y="-2732526"/>
-            <a:ext cx="1146798" cy="10280904"/>
-          </a:xfrm>
-          <a:prstGeom prst="bentConnector3">
-            <a:avLst>
-              <a:gd name="adj1" fmla="val 42026"/>
-            </a:avLst>
-          </a:prstGeom>
-          <a:ln>
-            <a:tailEnd type="triangle"/>
-          </a:ln>
-        </p:spPr>
-        <p:style>
-          <a:lnRef idx="2">
-            <a:schemeClr val="accent1"/>
-          </a:lnRef>
-          <a:fillRef idx="0">
-            <a:schemeClr val="accent1"/>
-          </a:fillRef>
-          <a:effectRef idx="1">
-            <a:schemeClr val="accent1"/>
-          </a:effectRef>
-          <a:fontRef idx="minor">
-            <a:schemeClr val="tx1"/>
-          </a:fontRef>
-        </p:style>
-      </p:cxnSp>
-      <p:sp>
-        <p:nvSpPr>
-          <p:cNvPr id="70" name="TextBox 69">
-            <a:extLst>
-              <a:ext uri="{FF2B5EF4-FFF2-40B4-BE49-F238E27FC236}">
-                <a16:creationId xmlns:a16="http://schemas.microsoft.com/office/drawing/2014/main" id="{F06DB7F5-E6CB-6179-5849-BE3833847C54}"/>
-              </a:ext>
-            </a:extLst>
-          </p:cNvPr>
-          <p:cNvSpPr txBox="1"/>
-          <p:nvPr/>
-        </p:nvSpPr>
-        <p:spPr>
-          <a:xfrm>
-            <a:off x="896112" y="2064402"/>
-            <a:ext cx="1493520" cy="276999"/>
-          </a:xfrm>
-          <a:prstGeom prst="rect">
-            <a:avLst/>
-          </a:prstGeom>
-          <a:noFill/>
-        </p:spPr>
-        <p:txBody>
-          <a:bodyPr wrap="square">
-            <a:spAutoFit/>
-          </a:bodyPr>
-          <a:lstStyle/>
-          <a:p>
-            <a:r>
-              <a:rPr lang="en-US" sz="1200" dirty="0" err="1"/>
-              <a:t>Z_i</a:t>
-            </a:r>
-            <a:r>
-              <a:rPr lang="en-US" sz="1200" dirty="0"/>
-              <a:t> = GAT(</a:t>
-            </a:r>
-            <a:r>
-              <a:rPr lang="en-US" sz="1200" dirty="0" err="1"/>
-              <a:t>F_i</a:t>
-            </a:r>
-            <a:r>
-              <a:rPr lang="en-US" sz="1200" dirty="0"/>
-              <a:t>, E) </a:t>
-            </a:r>
-          </a:p>
-        </p:txBody>
-      </p:sp>
-      <p:sp>
-        <p:nvSpPr>
-          <p:cNvPr id="78" name="Rectangle 77">
-            <a:extLst>
-              <a:ext uri="{FF2B5EF4-FFF2-40B4-BE49-F238E27FC236}">
-                <a16:creationId xmlns:a16="http://schemas.microsoft.com/office/drawing/2014/main" id="{9CC57157-270A-4793-6725-CC9FA51CDC2F}"/>
-              </a:ext>
-            </a:extLst>
-          </p:cNvPr>
-          <p:cNvSpPr/>
-          <p:nvPr/>
-        </p:nvSpPr>
-        <p:spPr>
-          <a:xfrm>
-            <a:off x="2485974" y="2805377"/>
-            <a:ext cx="1965960" cy="546906"/>
-          </a:xfrm>
-          <a:prstGeom prst="rect">
-            <a:avLst/>
-          </a:prstGeom>
-        </p:spPr>
-        <p:style>
-          <a:lnRef idx="2">
-            <a:schemeClr val="dk1"/>
-          </a:lnRef>
-          <a:fillRef idx="1">
-            <a:schemeClr val="lt1"/>
-          </a:fillRef>
-          <a:effectRef idx="0">
-            <a:schemeClr val="dk1"/>
-          </a:effectRef>
-          <a:fontRef idx="minor">
-            <a:schemeClr val="dk1"/>
-          </a:fontRef>
-        </p:style>
-        <p:txBody>
-          <a:bodyPr rtlCol="0" anchor="ctr"/>
-          <a:lstStyle/>
-          <a:p>
-            <a:pPr algn="ctr"/>
-            <a:r>
-              <a:rPr lang="en-US" sz="1400" b="1" dirty="0"/>
-              <a:t>Graph Augmentation</a:t>
-            </a:r>
-          </a:p>
-          <a:p>
-            <a:pPr algn="ctr"/>
-            <a:r>
-              <a:rPr lang="pl-PL" sz="1100" dirty="0"/>
-              <a:t>Mask nodes/channels</a:t>
-            </a:r>
-            <a:endParaRPr lang="en-US" sz="1100" dirty="0"/>
-          </a:p>
-          <a:p>
-            <a:pPr algn="ctr"/>
-            <a:r>
-              <a:rPr lang="en-US" sz="1100" dirty="0"/>
-              <a:t>Drop edges</a:t>
-            </a:r>
-          </a:p>
-        </p:txBody>
-      </p:sp>
-      <p:sp>
-        <p:nvSpPr>
-          <p:cNvPr id="79" name="Rectangle 78">
-            <a:extLst>
-              <a:ext uri="{FF2B5EF4-FFF2-40B4-BE49-F238E27FC236}">
-                <a16:creationId xmlns:a16="http://schemas.microsoft.com/office/drawing/2014/main" id="{A75C79FE-2582-1658-2CFA-29433A94F05A}"/>
-              </a:ext>
-            </a:extLst>
-          </p:cNvPr>
-          <p:cNvSpPr/>
-          <p:nvPr/>
-        </p:nvSpPr>
-        <p:spPr>
-          <a:xfrm>
-            <a:off x="2485974" y="3611920"/>
-            <a:ext cx="1965960" cy="546906"/>
-          </a:xfrm>
-          <a:prstGeom prst="rect">
-            <a:avLst/>
-          </a:prstGeom>
-        </p:spPr>
-        <p:style>
-          <a:lnRef idx="2">
-            <a:schemeClr val="dk1"/>
-          </a:lnRef>
-          <a:fillRef idx="1">
-            <a:schemeClr val="lt1"/>
-          </a:fillRef>
-          <a:effectRef idx="0">
-            <a:schemeClr val="dk1"/>
-          </a:effectRef>
-          <a:fontRef idx="minor">
-            <a:schemeClr val="dk1"/>
-          </a:fontRef>
-        </p:style>
-        <p:txBody>
-          <a:bodyPr rtlCol="0" anchor="ctr"/>
-          <a:lstStyle/>
-          <a:p>
-            <a:pPr algn="ctr"/>
-            <a:r>
-              <a:rPr lang="en-US" sz="1400" b="1" dirty="0"/>
-              <a:t>Self-Supervised Loss </a:t>
-            </a:r>
-            <a:r>
-              <a:rPr lang="pl-PL" sz="1100" dirty="0"/>
-              <a:t>L_contrast</a:t>
-            </a:r>
-            <a:r>
-              <a:rPr lang="en-US" sz="1100" dirty="0"/>
-              <a:t>+</a:t>
-            </a:r>
-            <a:r>
-              <a:rPr lang="en-US" sz="1100" dirty="0" err="1"/>
-              <a:t>L_mask</a:t>
-            </a:r>
-            <a:r>
-              <a:rPr lang="en-US" sz="1100" dirty="0"/>
-              <a:t> + </a:t>
-            </a:r>
-            <a:r>
-              <a:rPr lang="en-US" sz="1100" dirty="0" err="1"/>
-              <a:t>L_dist</a:t>
-            </a:r>
-            <a:r>
-              <a:rPr lang="en-US" sz="1100" dirty="0"/>
-              <a:t> </a:t>
-            </a:r>
-          </a:p>
-        </p:txBody>
-      </p:sp>
-      <p:sp>
-        <p:nvSpPr>
-          <p:cNvPr id="80" name="Rectangle 79">
-            <a:extLst>
-              <a:ext uri="{FF2B5EF4-FFF2-40B4-BE49-F238E27FC236}">
-                <a16:creationId xmlns:a16="http://schemas.microsoft.com/office/drawing/2014/main" id="{56528126-D06E-DCA0-8DB5-092BE7677A9C}"/>
-              </a:ext>
-            </a:extLst>
-          </p:cNvPr>
-          <p:cNvSpPr/>
-          <p:nvPr/>
-        </p:nvSpPr>
-        <p:spPr>
-          <a:xfrm>
-            <a:off x="2485974" y="4418463"/>
-            <a:ext cx="1965960" cy="546906"/>
-          </a:xfrm>
-          <a:prstGeom prst="rect">
-            <a:avLst/>
-          </a:prstGeom>
-        </p:spPr>
-        <p:style>
-          <a:lnRef idx="2">
-            <a:schemeClr val="dk1"/>
-          </a:lnRef>
-          <a:fillRef idx="1">
-            <a:schemeClr val="lt1"/>
-          </a:fillRef>
-          <a:effectRef idx="0">
-            <a:schemeClr val="dk1"/>
-          </a:effectRef>
-          <a:fontRef idx="minor">
-            <a:schemeClr val="dk1"/>
-          </a:fontRef>
-        </p:style>
-        <p:txBody>
-          <a:bodyPr rtlCol="0" anchor="ctr"/>
-          <a:lstStyle/>
-          <a:p>
-            <a:pPr algn="ctr"/>
-            <a:r>
-              <a:rPr lang="en-US" sz="1400" b="1" dirty="0"/>
-              <a:t>Backpropagation</a:t>
-            </a:r>
-          </a:p>
-          <a:p>
-            <a:pPr algn="ctr"/>
-            <a:r>
-              <a:rPr lang="el-GR" sz="1100" dirty="0"/>
-              <a:t>θ ← θ − η ∇θ</a:t>
-            </a:r>
-            <a:endParaRPr lang="en-US" sz="1100" dirty="0"/>
-          </a:p>
-        </p:txBody>
-      </p:sp>
-      <p:cxnSp>
-        <p:nvCxnSpPr>
-          <p:cNvPr id="82" name="Connector: Elbow 81">
-            <a:extLst>
-              <a:ext uri="{FF2B5EF4-FFF2-40B4-BE49-F238E27FC236}">
-                <a16:creationId xmlns:a16="http://schemas.microsoft.com/office/drawing/2014/main" id="{FE429611-EAD5-81B2-55FA-E331E40EB9DD}"/>
-              </a:ext>
-            </a:extLst>
-          </p:cNvPr>
-          <p:cNvCxnSpPr>
-            <a:cxnSpLocks/>
-            <a:stCxn id="80" idx="1"/>
-            <a:endCxn id="78" idx="1"/>
-          </p:cNvCxnSpPr>
-          <p:nvPr/>
-        </p:nvCxnSpPr>
-        <p:spPr>
-          <a:xfrm rot="10800000">
-            <a:off x="2485974" y="3078830"/>
-            <a:ext cx="12700" cy="1613086"/>
-          </a:xfrm>
-          <a:prstGeom prst="bentConnector3">
-            <a:avLst>
-              <a:gd name="adj1" fmla="val 1800000"/>
-            </a:avLst>
-          </a:prstGeom>
-          <a:ln>
-            <a:tailEnd type="triangle"/>
-          </a:ln>
-        </p:spPr>
-        <p:style>
-          <a:lnRef idx="2">
-            <a:schemeClr val="accent1"/>
-          </a:lnRef>
-          <a:fillRef idx="0">
-            <a:schemeClr val="accent1"/>
-          </a:fillRef>
-          <a:effectRef idx="1">
-            <a:schemeClr val="accent1"/>
-          </a:effectRef>
-          <a:fontRef idx="minor">
-            <a:schemeClr val="tx1"/>
-          </a:fontRef>
-        </p:style>
-      </p:cxnSp>
-      <p:sp>
-        <p:nvSpPr>
-          <p:cNvPr id="85" name="TextBox 84">
-            <a:extLst>
-              <a:ext uri="{FF2B5EF4-FFF2-40B4-BE49-F238E27FC236}">
-                <a16:creationId xmlns:a16="http://schemas.microsoft.com/office/drawing/2014/main" id="{42F158A9-6D47-3E14-E95D-648CAD1DDDAE}"/>
-              </a:ext>
-            </a:extLst>
-          </p:cNvPr>
-          <p:cNvSpPr txBox="1"/>
-          <p:nvPr/>
-        </p:nvSpPr>
-        <p:spPr>
-          <a:xfrm rot="16200000">
-            <a:off x="1131728" y="3717003"/>
-            <a:ext cx="1973856" cy="307777"/>
-          </a:xfrm>
-          <a:prstGeom prst="rect">
-            <a:avLst/>
-          </a:prstGeom>
-          <a:noFill/>
-        </p:spPr>
-        <p:txBody>
-          <a:bodyPr wrap="square">
-            <a:spAutoFit/>
-          </a:bodyPr>
-          <a:lstStyle/>
-          <a:p>
-            <a:r>
-              <a:rPr lang="en-US" sz="1400" dirty="0"/>
+              <a:rPr lang="en-US" sz="1400" dirty="0">
+                <a:latin typeface="Times New Roman" panose="02020603050405020304" pitchFamily="18" charset="0"/>
+                <a:cs typeface="Times New Roman" panose="02020603050405020304" pitchFamily="18" charset="0"/>
+              </a:rPr>
               <a:t>Repeat until converged</a:t>
             </a:r>
           </a:p>
@@ -4593,15 +4431,14 @@
           </p:cNvPr>
           <p:cNvCxnSpPr>
             <a:cxnSpLocks/>
-            <a:stCxn id="78" idx="2"/>
             <a:endCxn id="79" idx="0"/>
           </p:cNvCxnSpPr>
           <p:nvPr/>
         </p:nvCxnSpPr>
         <p:spPr>
           <a:xfrm>
-            <a:off x="3468954" y="3352283"/>
-            <a:ext cx="0" cy="259637"/>
+            <a:off x="3949699" y="3386389"/>
+            <a:ext cx="1841" cy="225530"/>
           </a:xfrm>
           <a:prstGeom prst="straightConnector1">
             <a:avLst/>
@@ -4641,7 +4478,7 @@
         </p:nvCxnSpPr>
         <p:spPr>
           <a:xfrm>
-            <a:off x="3470478" y="4158826"/>
+            <a:off x="3954445" y="4158825"/>
             <a:ext cx="0" cy="259637"/>
           </a:xfrm>
           <a:prstGeom prst="straightConnector1">
@@ -4683,8 +4520,8 @@
         </p:nvCxnSpPr>
         <p:spPr>
           <a:xfrm>
-            <a:off x="1609344" y="3429000"/>
-            <a:ext cx="382143" cy="0"/>
+            <a:off x="1086278" y="3429000"/>
+            <a:ext cx="1476581" cy="0"/>
           </a:xfrm>
           <a:prstGeom prst="straightConnector1">
             <a:avLst/>
@@ -4722,8 +4559,8 @@
         </p:nvSpPr>
         <p:spPr>
           <a:xfrm>
-            <a:off x="1596200" y="3061409"/>
-            <a:ext cx="509014" cy="307777"/>
+            <a:off x="1067379" y="3149128"/>
+            <a:ext cx="1373840" cy="261610"/>
           </a:xfrm>
           <a:prstGeom prst="rect">
             <a:avLst/>
@@ -4737,10 +4574,23 @@
           <a:lstStyle/>
           <a:p>
             <a:r>
-              <a:rPr lang="pl-PL" sz="1400" dirty="0"/>
-              <a:t>s_i</a:t>
-            </a:r>
-            <a:endParaRPr lang="en-US" sz="1400" dirty="0"/>
+              <a:rPr lang="en-US" sz="1100" dirty="0">
+                <a:latin typeface="Times New Roman" panose="02020603050405020304" pitchFamily="18" charset="0"/>
+                <a:cs typeface="Times New Roman" panose="02020603050405020304" pitchFamily="18" charset="0"/>
+              </a:rPr>
+              <a:t>S</a:t>
+            </a:r>
+            <a:r>
+              <a:rPr lang="pl-PL" sz="1100" dirty="0">
+                <a:latin typeface="Times New Roman" panose="02020603050405020304" pitchFamily="18" charset="0"/>
+                <a:cs typeface="Times New Roman" panose="02020603050405020304" pitchFamily="18" charset="0"/>
+              </a:rPr>
+              <a:t>_i(k) = σ(w_kᵀ Z_i)</a:t>
+            </a:r>
+            <a:endParaRPr lang="en-US" sz="1100" dirty="0">
+              <a:latin typeface="Times New Roman" panose="02020603050405020304" pitchFamily="18" charset="0"/>
+              <a:cs typeface="Times New Roman" panose="02020603050405020304" pitchFamily="18" charset="0"/>
+            </a:endParaRPr>
           </a:p>
         </p:txBody>
       </p:sp>
@@ -4758,8 +4608,8 @@
         </p:nvSpPr>
         <p:spPr>
           <a:xfrm>
-            <a:off x="5294605" y="2805377"/>
-            <a:ext cx="1184376" cy="1618628"/>
+            <a:off x="5426413" y="2758377"/>
+            <a:ext cx="1167046" cy="1618628"/>
           </a:xfrm>
           <a:prstGeom prst="rect">
             <a:avLst/>
@@ -4783,61 +4633,13 @@
           <a:bodyPr rtlCol="0" anchor="ctr"/>
           <a:lstStyle/>
           <a:p>
-            <a:pPr algn="ctr"/>
-            <a:r>
-              <a:rPr lang="en-US" sz="1400" b="1" dirty="0"/>
-              <a:t>Inference</a:t>
-            </a:r>
-          </a:p>
-          <a:p>
-            <a:pPr algn="ctr"/>
-            <a:r>
-              <a:rPr lang="en-US" sz="1400" b="1" dirty="0"/>
-              <a:t>GAT Model </a:t>
-            </a:r>
-          </a:p>
-          <a:p>
-            <a:pPr algn="ctr"/>
-            <a:r>
-              <a:rPr lang="en-US" sz="1100" dirty="0"/>
-              <a:t> Run trained GAT on original graph G:  </a:t>
-            </a:r>
-          </a:p>
-          <a:p>
-            <a:pPr algn="ctr"/>
-            <a:r>
-              <a:rPr lang="en-US" sz="1100" dirty="0"/>
-              <a:t>   Z = GAT(G) </a:t>
-            </a:r>
-            <a:r>
-              <a:rPr lang="en-US" sz="1100" dirty="0" err="1"/>
-              <a:t>s_i</a:t>
-            </a:r>
-            <a:r>
-              <a:rPr lang="en-US" sz="1100" dirty="0"/>
-              <a:t>(k)=σ(</a:t>
-            </a:r>
-            <a:r>
-              <a:rPr lang="en-US" sz="1100" dirty="0" err="1"/>
-              <a:t>w_k</a:t>
-            </a:r>
-            <a:r>
-              <a:rPr lang="en-US" sz="1100" dirty="0"/>
-              <a:t>ᵀ </a:t>
-            </a:r>
-            <a:r>
-              <a:rPr lang="en-US" sz="1100" dirty="0" err="1"/>
-              <a:t>Z_i</a:t>
-            </a:r>
-            <a:r>
-              <a:rPr lang="en-US" sz="1100" dirty="0"/>
-              <a:t>)</a:t>
-            </a:r>
-            <a:r>
-              <a:rPr lang="en-US" sz="1100" dirty="0" err="1"/>
-              <a:t>i</a:t>
-            </a:r>
-            <a:endParaRPr lang="en-US" sz="1100" dirty="0"/>
+            <a:r>
+              <a:rPr lang="en-US" sz="1400" b="1" dirty="0">
+                <a:latin typeface="Times New Roman" panose="02020603050405020304" pitchFamily="18" charset="0"/>
+                <a:cs typeface="Times New Roman" panose="02020603050405020304" pitchFamily="18" charset="0"/>
+              </a:rPr>
+              <a:t>SSL-Trained GAT Inference   </a:t>
+            </a:r>
           </a:p>
         </p:txBody>
       </p:sp>
@@ -4857,8 +4659,8 @@
         </p:nvCxnSpPr>
         <p:spPr>
           <a:xfrm>
-            <a:off x="6478981" y="3553897"/>
-            <a:ext cx="554030" cy="0"/>
+            <a:off x="6612366" y="3438152"/>
+            <a:ext cx="1058528" cy="0"/>
           </a:xfrm>
           <a:prstGeom prst="straightConnector1">
             <a:avLst/>
@@ -4896,8 +4698,8 @@
         </p:nvSpPr>
         <p:spPr>
           <a:xfrm>
-            <a:off x="6512891" y="3246120"/>
-            <a:ext cx="509014" cy="307777"/>
+            <a:off x="6560406" y="3508528"/>
+            <a:ext cx="1162448" cy="261610"/>
           </a:xfrm>
           <a:prstGeom prst="rect">
             <a:avLst/>
@@ -4911,23 +4713,35 @@
           <a:lstStyle/>
           <a:p>
             <a:r>
-              <a:rPr lang="en-US" sz="1400" dirty="0"/>
+              <a:rPr lang="en-US" sz="1100" dirty="0">
+                <a:latin typeface="Times New Roman" panose="02020603050405020304" pitchFamily="18" charset="0"/>
+                <a:cs typeface="Times New Roman" panose="02020603050405020304" pitchFamily="18" charset="0"/>
+              </a:rPr>
               <a:t>S</a:t>
             </a:r>
             <a:r>
-              <a:rPr lang="pl-PL" sz="1400" dirty="0"/>
+              <a:rPr lang="pl-PL" sz="1100" dirty="0">
+                <a:latin typeface="Times New Roman" panose="02020603050405020304" pitchFamily="18" charset="0"/>
+                <a:cs typeface="Times New Roman" panose="02020603050405020304" pitchFamily="18" charset="0"/>
+              </a:rPr>
               <a:t>_i</a:t>
             </a:r>
-            <a:endParaRPr lang="en-US" sz="1400" dirty="0"/>
-          </a:p>
-        </p:txBody>
-      </p:sp>
-      <p:sp>
-        <p:nvSpPr>
-          <p:cNvPr id="107" name="TextBox 106">
-            <a:extLst>
-              <a:ext uri="{FF2B5EF4-FFF2-40B4-BE49-F238E27FC236}">
-                <a16:creationId xmlns:a16="http://schemas.microsoft.com/office/drawing/2014/main" id="{BBF5E1C9-40AE-29F2-D823-C9E50C2102F6}"/>
+            <a:r>
+              <a:rPr lang="en-US" sz="1100" dirty="0">
+                <a:latin typeface="Times New Roman" panose="02020603050405020304" pitchFamily="18" charset="0"/>
+                <a:cs typeface="Times New Roman" panose="02020603050405020304" pitchFamily="18" charset="0"/>
+              </a:rPr>
+              <a:t>={s_1,..,s_m}</a:t>
+            </a:r>
+          </a:p>
+        </p:txBody>
+      </p:sp>
+      <p:sp>
+        <p:nvSpPr>
+          <p:cNvPr id="111" name="TextBox 110">
+            <a:extLst>
+              <a:ext uri="{FF2B5EF4-FFF2-40B4-BE49-F238E27FC236}">
+                <a16:creationId xmlns:a16="http://schemas.microsoft.com/office/drawing/2014/main" id="{321E6AD8-2C7B-FAEA-2BB2-9869AFDF69CA}"/>
               </a:ext>
             </a:extLst>
           </p:cNvPr>
@@ -4936,8 +4750,8 @@
         </p:nvSpPr>
         <p:spPr>
           <a:xfrm>
-            <a:off x="6513652" y="3594347"/>
-            <a:ext cx="509014" cy="307777"/>
+            <a:off x="5000515" y="3125177"/>
+            <a:ext cx="607056" cy="600164"/>
           </a:xfrm>
           <a:prstGeom prst="rect">
             <a:avLst/>
@@ -4951,49 +4765,42 @@
           <a:lstStyle/>
           <a:p>
             <a:r>
-              <a:rPr lang="en-US" sz="1400" dirty="0"/>
-              <a:t>Z</a:t>
-            </a:r>
-            <a:r>
-              <a:rPr lang="pl-PL" sz="1400" dirty="0"/>
-              <a:t>_i</a:t>
-            </a:r>
-            <a:endParaRPr lang="en-US" sz="1400" dirty="0"/>
-          </a:p>
-        </p:txBody>
-      </p:sp>
-      <p:sp>
-        <p:nvSpPr>
-          <p:cNvPr id="111" name="TextBox 110">
-            <a:extLst>
-              <a:ext uri="{FF2B5EF4-FFF2-40B4-BE49-F238E27FC236}">
-                <a16:creationId xmlns:a16="http://schemas.microsoft.com/office/drawing/2014/main" id="{321E6AD8-2C7B-FAEA-2BB2-9869AFDF69CA}"/>
-              </a:ext>
-            </a:extLst>
-          </p:cNvPr>
-          <p:cNvSpPr txBox="1"/>
-          <p:nvPr/>
-        </p:nvSpPr>
-        <p:spPr>
-          <a:xfrm>
-            <a:off x="4477140" y="3203134"/>
-            <a:ext cx="852107" cy="523220"/>
-          </a:xfrm>
-          <a:prstGeom prst="rect">
-            <a:avLst/>
-          </a:prstGeom>
-          <a:noFill/>
-        </p:spPr>
-        <p:txBody>
-          <a:bodyPr wrap="square">
-            <a:spAutoFit/>
-          </a:bodyPr>
-          <a:lstStyle/>
-          <a:p>
-            <a:r>
-              <a:rPr lang="en-US" sz="1400" dirty="0"/>
-              <a:t>Updated Weights</a:t>
-            </a:r>
+              <a:rPr lang="en-US" sz="1100" dirty="0" err="1">
+                <a:latin typeface="Times New Roman" panose="02020603050405020304" pitchFamily="18" charset="0"/>
+                <a:cs typeface="Times New Roman" panose="02020603050405020304" pitchFamily="18" charset="0"/>
+              </a:rPr>
+              <a:t>W_k</a:t>
+            </a:r>
+            <a:endParaRPr lang="en-US" sz="1100" dirty="0">
+              <a:latin typeface="Times New Roman" panose="02020603050405020304" pitchFamily="18" charset="0"/>
+              <a:cs typeface="Times New Roman" panose="02020603050405020304" pitchFamily="18" charset="0"/>
+            </a:endParaRPr>
+          </a:p>
+          <a:p>
+            <a:r>
+              <a:rPr lang="en-US" sz="1100" dirty="0">
+                <a:latin typeface="Times New Roman" panose="02020603050405020304" pitchFamily="18" charset="0"/>
+                <a:cs typeface="Times New Roman" panose="02020603050405020304" pitchFamily="18" charset="0"/>
+              </a:rPr>
+              <a:t> </a:t>
+            </a:r>
+            <a:br>
+              <a:rPr lang="en-US" sz="1100" dirty="0">
+                <a:latin typeface="Times New Roman" panose="02020603050405020304" pitchFamily="18" charset="0"/>
+                <a:cs typeface="Times New Roman" panose="02020603050405020304" pitchFamily="18" charset="0"/>
+              </a:rPr>
+            </a:br>
+            <a:r>
+              <a:rPr lang="pl-PL" sz="1100" dirty="0">
+                <a:latin typeface="Times New Roman" panose="02020603050405020304" pitchFamily="18" charset="0"/>
+                <a:cs typeface="Times New Roman" panose="02020603050405020304" pitchFamily="18" charset="0"/>
+              </a:rPr>
+              <a:t>Z_i</a:t>
+            </a:r>
+            <a:endParaRPr lang="en-US" sz="1100" dirty="0">
+              <a:latin typeface="Times New Roman" panose="02020603050405020304" pitchFamily="18" charset="0"/>
+              <a:cs typeface="Times New Roman" panose="02020603050405020304" pitchFamily="18" charset="0"/>
+            </a:endParaRPr>
           </a:p>
         </p:txBody>
       </p:sp>
@@ -5011,8 +4818,8 @@
         </p:nvSpPr>
         <p:spPr>
           <a:xfrm>
-            <a:off x="7033011" y="2387011"/>
-            <a:ext cx="2950278" cy="2743690"/>
+            <a:off x="7670894" y="2460229"/>
+            <a:ext cx="2356060" cy="2680073"/>
           </a:xfrm>
           <a:prstGeom prst="roundRect">
             <a:avLst/>
@@ -5036,47 +4843,67 @@
           <a:bodyPr rtlCol="0" anchor="ctr"/>
           <a:lstStyle/>
           <a:p>
-            <a:pPr algn="ctr"/>
-            <a:r>
-              <a:rPr lang="en-US" sz="1400" b="1" dirty="0"/>
-              <a:t>Roi Scoring &amp; Extraction</a:t>
-            </a:r>
-          </a:p>
-          <a:p>
-            <a:pPr algn="ctr"/>
-            <a:endParaRPr lang="en-US" b="1" dirty="0"/>
-          </a:p>
-          <a:p>
-            <a:pPr algn="ctr"/>
-            <a:endParaRPr lang="en-US" b="1" dirty="0"/>
-          </a:p>
-          <a:p>
-            <a:pPr algn="ctr"/>
-            <a:endParaRPr lang="en-US" b="1" dirty="0"/>
-          </a:p>
-          <a:p>
-            <a:pPr algn="ctr"/>
-            <a:endParaRPr lang="en-US" b="1" dirty="0"/>
-          </a:p>
-          <a:p>
-            <a:pPr algn="ctr"/>
-            <a:endParaRPr lang="en-US" b="1" dirty="0"/>
-          </a:p>
-          <a:p>
-            <a:pPr algn="ctr"/>
-            <a:endParaRPr lang="en-US" b="1" dirty="0"/>
-          </a:p>
-          <a:p>
-            <a:pPr algn="ctr"/>
-            <a:endParaRPr lang="en-US" b="1" dirty="0"/>
-          </a:p>
-          <a:p>
-            <a:pPr algn="ctr"/>
-            <a:endParaRPr lang="en-US" b="1" dirty="0"/>
-          </a:p>
-          <a:p>
-            <a:pPr algn="ctr"/>
-            <a:endParaRPr lang="en-US" b="1" dirty="0"/>
+            <a:r>
+              <a:rPr lang="en-US" sz="1400" b="1" dirty="0">
+                <a:latin typeface="Times New Roman" panose="02020603050405020304" pitchFamily="18" charset="0"/>
+                <a:cs typeface="Times New Roman" panose="02020603050405020304" pitchFamily="18" charset="0"/>
+              </a:rPr>
+              <a:t>Roi scoring &amp; Extraction</a:t>
+            </a:r>
+          </a:p>
+          <a:p>
+            <a:endParaRPr lang="en-US" b="1" dirty="0">
+              <a:latin typeface="Times New Roman" panose="02020603050405020304" pitchFamily="18" charset="0"/>
+              <a:cs typeface="Times New Roman" panose="02020603050405020304" pitchFamily="18" charset="0"/>
+            </a:endParaRPr>
+          </a:p>
+          <a:p>
+            <a:endParaRPr lang="en-US" b="1" dirty="0">
+              <a:latin typeface="Times New Roman" panose="02020603050405020304" pitchFamily="18" charset="0"/>
+              <a:cs typeface="Times New Roman" panose="02020603050405020304" pitchFamily="18" charset="0"/>
+            </a:endParaRPr>
+          </a:p>
+          <a:p>
+            <a:endParaRPr lang="en-US" b="1" dirty="0">
+              <a:latin typeface="Times New Roman" panose="02020603050405020304" pitchFamily="18" charset="0"/>
+              <a:cs typeface="Times New Roman" panose="02020603050405020304" pitchFamily="18" charset="0"/>
+            </a:endParaRPr>
+          </a:p>
+          <a:p>
+            <a:endParaRPr lang="en-US" b="1" dirty="0">
+              <a:latin typeface="Times New Roman" panose="02020603050405020304" pitchFamily="18" charset="0"/>
+              <a:cs typeface="Times New Roman" panose="02020603050405020304" pitchFamily="18" charset="0"/>
+            </a:endParaRPr>
+          </a:p>
+          <a:p>
+            <a:endParaRPr lang="en-US" b="1" dirty="0">
+              <a:latin typeface="Times New Roman" panose="02020603050405020304" pitchFamily="18" charset="0"/>
+              <a:cs typeface="Times New Roman" panose="02020603050405020304" pitchFamily="18" charset="0"/>
+            </a:endParaRPr>
+          </a:p>
+          <a:p>
+            <a:endParaRPr lang="en-US" b="1" dirty="0">
+              <a:latin typeface="Times New Roman" panose="02020603050405020304" pitchFamily="18" charset="0"/>
+              <a:cs typeface="Times New Roman" panose="02020603050405020304" pitchFamily="18" charset="0"/>
+            </a:endParaRPr>
+          </a:p>
+          <a:p>
+            <a:endParaRPr lang="en-US" b="1" dirty="0">
+              <a:latin typeface="Times New Roman" panose="02020603050405020304" pitchFamily="18" charset="0"/>
+              <a:cs typeface="Times New Roman" panose="02020603050405020304" pitchFamily="18" charset="0"/>
+            </a:endParaRPr>
+          </a:p>
+          <a:p>
+            <a:endParaRPr lang="en-US" b="1" dirty="0">
+              <a:latin typeface="Times New Roman" panose="02020603050405020304" pitchFamily="18" charset="0"/>
+              <a:cs typeface="Times New Roman" panose="02020603050405020304" pitchFamily="18" charset="0"/>
+            </a:endParaRPr>
+          </a:p>
+          <a:p>
+            <a:endParaRPr lang="en-US" b="1" dirty="0">
+              <a:latin typeface="Times New Roman" panose="02020603050405020304" pitchFamily="18" charset="0"/>
+              <a:cs typeface="Times New Roman" panose="02020603050405020304" pitchFamily="18" charset="0"/>
+            </a:endParaRPr>
           </a:p>
         </p:txBody>
       </p:sp>
@@ -5094,8 +4921,8 @@
         </p:nvSpPr>
         <p:spPr>
           <a:xfrm>
-            <a:off x="7780821" y="2707872"/>
-            <a:ext cx="1965960" cy="546906"/>
+            <a:off x="7752059" y="2801629"/>
+            <a:ext cx="2115411" cy="546906"/>
           </a:xfrm>
           <a:prstGeom prst="rect">
             <a:avLst/>
@@ -5119,19 +4946,23 @@
           <a:bodyPr rtlCol="0" anchor="ctr"/>
           <a:lstStyle/>
           <a:p>
-            <a:pPr algn="ctr"/>
-            <a:r>
-              <a:rPr lang="en-US" sz="1400" b="1" dirty="0"/>
-              <a:t>Interaction scoring</a:t>
-            </a:r>
-          </a:p>
-          <a:p>
-            <a:pPr algn="ctr"/>
-            <a:r>
-              <a:rPr lang="pl-PL" sz="1100" dirty="0"/>
-              <a:t>RadScore_R(k)(i)</a:t>
-            </a:r>
-            <a:endParaRPr lang="en-US" sz="1100" dirty="0"/>
+            <a:r>
+              <a:rPr lang="en-US" sz="1400" b="1" dirty="0">
+                <a:latin typeface="Times New Roman" panose="02020603050405020304" pitchFamily="18" charset="0"/>
+                <a:cs typeface="Times New Roman" panose="02020603050405020304" pitchFamily="18" charset="0"/>
+              </a:rPr>
+              <a:t>Pairwise interaction</a:t>
+            </a:r>
+          </a:p>
+          <a:p>
+            <a:r>
+              <a:rPr lang="en-US" sz="1200" dirty="0"/>
+              <a:t>Iᵢⱼ⁽ᵏ⁾ = sᵢ⁽ᵏ⁾ · sⱼ⁽ᵏ⁾ · Īᵢ⁽ᵏ⁾ · Īⱼ⁽ᵏ⁾ · wij</a:t>
+            </a:r>
+            <a:endParaRPr lang="en-US" sz="900" dirty="0">
+              <a:latin typeface="Times New Roman" panose="02020603050405020304" pitchFamily="18" charset="0"/>
+              <a:cs typeface="Times New Roman" panose="02020603050405020304" pitchFamily="18" charset="0"/>
+            </a:endParaRPr>
           </a:p>
         </p:txBody>
       </p:sp>
@@ -5149,8 +4980,8 @@
         </p:nvSpPr>
         <p:spPr>
           <a:xfrm>
-            <a:off x="7780821" y="3514414"/>
-            <a:ext cx="1965960" cy="641211"/>
+            <a:off x="7824487" y="3621522"/>
+            <a:ext cx="1965960" cy="658328"/>
           </a:xfrm>
           <a:prstGeom prst="rect">
             <a:avLst/>
@@ -5174,29 +5005,47 @@
           <a:bodyPr rtlCol="0" anchor="ctr"/>
           <a:lstStyle/>
           <a:p>
-            <a:pPr algn="ctr"/>
-            <a:r>
-              <a:rPr lang="en-US" sz="1400" b="1" dirty="0"/>
-              <a:t>ROI detection</a:t>
-            </a:r>
-          </a:p>
-          <a:p>
-            <a:pPr algn="ctr"/>
-            <a:r>
-              <a:rPr lang="en-US" sz="1400" b="1" dirty="0"/>
-              <a:t> </a:t>
-            </a:r>
-            <a:r>
-              <a:rPr lang="en-US" sz="1100" dirty="0"/>
-              <a:t>threshold top p% </a:t>
-            </a:r>
-          </a:p>
-          <a:p>
-            <a:pPr algn="ctr"/>
-            <a:r>
-              <a:rPr lang="en-US" sz="1100" dirty="0"/>
-              <a:t>3D connected components</a:t>
-            </a:r>
+            <a:r>
+              <a:rPr lang="en-US" sz="1400" b="1" dirty="0">
+                <a:latin typeface="Times New Roman" panose="02020603050405020304" pitchFamily="18" charset="0"/>
+                <a:cs typeface="Times New Roman" panose="02020603050405020304" pitchFamily="18" charset="0"/>
+              </a:rPr>
+              <a:t>Node-level interaction</a:t>
+            </a:r>
+          </a:p>
+          <a:p>
+            <a:r>
+              <a:rPr lang="en-US" sz="1200" dirty="0"/>
+              <a:t>Scoreᵣ⁽ᵏ⁾(</a:t>
+            </a:r>
+            <a:r>
+              <a:rPr lang="en-US" sz="1200" dirty="0" err="1"/>
+              <a:t>i</a:t>
+            </a:r>
+            <a:r>
+              <a:rPr lang="en-US" sz="1200" dirty="0"/>
+              <a:t>) = max { Iᵢⱼ⁽ᵏ⁾ | j ∈ Nᵣ(</a:t>
+            </a:r>
+            <a:r>
+              <a:rPr lang="en-US" sz="1200" dirty="0" err="1"/>
+              <a:t>i</a:t>
+            </a:r>
+            <a:r>
+              <a:rPr lang="en-US" sz="1200" dirty="0"/>
+              <a:t>), j ≠ </a:t>
+            </a:r>
+            <a:r>
+              <a:rPr lang="en-US" sz="1200" dirty="0" err="1"/>
+              <a:t>i</a:t>
+            </a:r>
+            <a:r>
+              <a:rPr lang="en-US" sz="1200" dirty="0"/>
+              <a:t> }</a:t>
+            </a:r>
+            <a:endParaRPr lang="en-US" sz="900" dirty="0">
+              <a:latin typeface="Times New Roman" panose="02020603050405020304" pitchFamily="18" charset="0"/>
+              <a:cs typeface="Times New Roman" panose="02020603050405020304" pitchFamily="18" charset="0"/>
+            </a:endParaRPr>
           </a:p>
         </p:txBody>
       </p:sp>
@@ -5214,8 +5063,8 @@
         </p:nvSpPr>
         <p:spPr>
           <a:xfrm>
-            <a:off x="7780821" y="4320957"/>
-            <a:ext cx="1965960" cy="682895"/>
+            <a:off x="7824487" y="4445876"/>
+            <a:ext cx="1965960" cy="597756"/>
           </a:xfrm>
           <a:prstGeom prst="rect">
             <a:avLst/>
@@ -5239,32 +5088,30 @@
           <a:bodyPr rtlCol="0" anchor="ctr"/>
           <a:lstStyle/>
           <a:p>
-            <a:pPr algn="ctr"/>
-            <a:r>
-              <a:rPr lang="en-US" sz="1400" b="1" dirty="0"/>
-              <a:t>ROI summarization</a:t>
-            </a:r>
-          </a:p>
-          <a:p>
-            <a:pPr algn="ctr"/>
-            <a:r>
-              <a:rPr lang="en-US" sz="1100" dirty="0"/>
-              <a:t>- centroid, size                           </a:t>
-            </a:r>
-          </a:p>
-          <a:p>
-            <a:pPr algn="ctr"/>
-            <a:r>
-              <a:rPr lang="en-US" sz="1100" dirty="0"/>
-              <a:t>- mean saliency                             - signature </a:t>
-            </a:r>
-            <a:r>
-              <a:rPr lang="el-GR" sz="1100" dirty="0"/>
-              <a:t>μ(</a:t>
-            </a:r>
-            <a:r>
-              <a:rPr lang="en-US" sz="1100" dirty="0"/>
-              <a:t>k)</a:t>
+            <a:r>
+              <a:rPr lang="en-US" sz="1400" b="1" dirty="0">
+                <a:latin typeface="Times New Roman" panose="02020603050405020304" pitchFamily="18" charset="0"/>
+                <a:cs typeface="Times New Roman" panose="02020603050405020304" pitchFamily="18" charset="0"/>
+              </a:rPr>
+              <a:t>Sort scores</a:t>
+            </a:r>
+          </a:p>
+          <a:p>
+            <a:r>
+              <a:rPr lang="en-US" sz="1200" dirty="0">
+                <a:latin typeface="Times New Roman" panose="02020603050405020304" pitchFamily="18" charset="0"/>
+                <a:cs typeface="Times New Roman" panose="02020603050405020304" pitchFamily="18" charset="0"/>
+              </a:rPr>
+              <a:t>- scores                           </a:t>
+            </a:r>
+          </a:p>
+          <a:p>
+            <a:r>
+              <a:rPr lang="en-US" sz="1200" dirty="0">
+                <a:latin typeface="Times New Roman" panose="02020603050405020304" pitchFamily="18" charset="0"/>
+                <a:cs typeface="Times New Roman" panose="02020603050405020304" pitchFamily="18" charset="0"/>
+              </a:rPr>
+              <a:t>- coordinates</a:t>
             </a:r>
           </a:p>
         </p:txBody>
@@ -5286,9 +5133,9 @@
           <p:nvPr/>
         </p:nvCxnSpPr>
         <p:spPr>
-          <a:xfrm>
-            <a:off x="8763801" y="3254778"/>
-            <a:ext cx="0" cy="259636"/>
+          <a:xfrm flipH="1">
+            <a:off x="8807467" y="3348535"/>
+            <a:ext cx="2298" cy="272987"/>
           </a:xfrm>
           <a:prstGeom prst="straightConnector1">
             <a:avLst/>
@@ -5324,13 +5171,14 @@
           <p:cNvCxnSpPr>
             <a:cxnSpLocks/>
             <a:stCxn id="118" idx="2"/>
+            <a:endCxn id="119" idx="0"/>
           </p:cNvCxnSpPr>
           <p:nvPr/>
         </p:nvCxnSpPr>
         <p:spPr>
           <a:xfrm>
-            <a:off x="8763801" y="4155625"/>
-            <a:ext cx="1524" cy="165333"/>
+            <a:off x="8807467" y="4279850"/>
+            <a:ext cx="0" cy="166026"/>
           </a:xfrm>
           <a:prstGeom prst="straightConnector1">
             <a:avLst/>
@@ -5370,8 +5218,8 @@
         </p:nvCxnSpPr>
         <p:spPr>
           <a:xfrm>
-            <a:off x="4546893" y="3475412"/>
-            <a:ext cx="753228" cy="0"/>
+            <a:off x="5007404" y="3435250"/>
+            <a:ext cx="419009" cy="2902"/>
           </a:xfrm>
           <a:prstGeom prst="straightConnector1">
             <a:avLst/>
@@ -5409,8 +5257,8 @@
         </p:nvSpPr>
         <p:spPr>
           <a:xfrm>
-            <a:off x="10533537" y="2975541"/>
-            <a:ext cx="1426464" cy="1180084"/>
+            <a:off x="10734513" y="2845208"/>
+            <a:ext cx="1401937" cy="1180084"/>
           </a:xfrm>
           <a:prstGeom prst="rect">
             <a:avLst/>
@@ -5434,21 +5282,49 @@
           <a:bodyPr rtlCol="0" anchor="ctr"/>
           <a:lstStyle/>
           <a:p>
-            <a:pPr algn="ctr"/>
-            <a:r>
-              <a:rPr lang="en-US" sz="1400" b="1" dirty="0"/>
+            <a:r>
+              <a:rPr lang="en-US" sz="1400" b="1" dirty="0">
+                <a:latin typeface="Times New Roman" panose="02020603050405020304" pitchFamily="18" charset="0"/>
+                <a:cs typeface="Times New Roman" panose="02020603050405020304" pitchFamily="18" charset="0"/>
+              </a:rPr>
               <a:t>Output</a:t>
             </a:r>
           </a:p>
           <a:p>
-            <a:pPr algn="ctr"/>
-            <a:endParaRPr lang="en-US" sz="1400" b="1" dirty="0"/>
-          </a:p>
-          <a:p>
-            <a:pPr algn="ctr"/>
-            <a:r>
-              <a:rPr lang="en-US" sz="1100" dirty="0"/>
-              <a:t>Trained GAT Saliency heatmaps ROI masks</a:t>
+            <a:endParaRPr lang="en-US" sz="1400" b="1" dirty="0">
+              <a:latin typeface="Times New Roman" panose="02020603050405020304" pitchFamily="18" charset="0"/>
+              <a:cs typeface="Times New Roman" panose="02020603050405020304" pitchFamily="18" charset="0"/>
+            </a:endParaRPr>
+          </a:p>
+          <a:p>
+            <a:r>
+              <a:rPr lang="en-US" sz="1200" dirty="0">
+                <a:latin typeface="Times New Roman" panose="02020603050405020304" pitchFamily="18" charset="0"/>
+                <a:cs typeface="Times New Roman" panose="02020603050405020304" pitchFamily="18" charset="0"/>
+              </a:rPr>
+              <a:t>-GAT model</a:t>
+            </a:r>
+            <a:br>
+              <a:rPr lang="en-US" sz="1200" dirty="0">
+                <a:latin typeface="Times New Roman" panose="02020603050405020304" pitchFamily="18" charset="0"/>
+                <a:cs typeface="Times New Roman" panose="02020603050405020304" pitchFamily="18" charset="0"/>
+              </a:rPr>
+            </a:br>
+            <a:r>
+              <a:rPr lang="en-US" sz="1200" dirty="0">
+                <a:latin typeface="Times New Roman" panose="02020603050405020304" pitchFamily="18" charset="0"/>
+                <a:cs typeface="Times New Roman" panose="02020603050405020304" pitchFamily="18" charset="0"/>
+              </a:rPr>
+              <a:t>-Saliency map </a:t>
+            </a:r>
+          </a:p>
+          <a:p>
+            <a:r>
+              <a:rPr lang="en-US" sz="1200" dirty="0">
+                <a:latin typeface="Times New Roman" panose="02020603050405020304" pitchFamily="18" charset="0"/>
+                <a:cs typeface="Times New Roman" panose="02020603050405020304" pitchFamily="18" charset="0"/>
+              </a:rPr>
+              <a:t>-ROI masks</a:t>
             </a:r>
           </a:p>
         </p:txBody>
@@ -5464,14 +5340,13 @@
           </p:cNvPr>
           <p:cNvCxnSpPr>
             <a:cxnSpLocks/>
-            <a:endCxn id="150" idx="1"/>
           </p:cNvCxnSpPr>
           <p:nvPr/>
         </p:nvCxnSpPr>
         <p:spPr>
           <a:xfrm>
-            <a:off x="9983289" y="3565583"/>
-            <a:ext cx="550248" cy="0"/>
+            <a:off x="10026954" y="3462664"/>
+            <a:ext cx="707559" cy="0"/>
           </a:xfrm>
           <a:prstGeom prst="straightConnector1">
             <a:avLst/>
@@ -5495,6 +5370,494 @@
           </a:fontRef>
         </p:style>
       </p:cxnSp>
+      <p:cxnSp>
+        <p:nvCxnSpPr>
+          <p:cNvPr id="10" name="Straight Arrow Connector 9">
+            <a:extLst>
+              <a:ext uri="{FF2B5EF4-FFF2-40B4-BE49-F238E27FC236}">
+                <a16:creationId xmlns:a16="http://schemas.microsoft.com/office/drawing/2014/main" id="{664887E0-F737-ABFD-8132-35D9AC57E235}"/>
+              </a:ext>
+            </a:extLst>
+          </p:cNvPr>
+          <p:cNvCxnSpPr>
+            <a:cxnSpLocks/>
+            <a:stCxn id="4" idx="3"/>
+            <a:endCxn id="11" idx="1"/>
+          </p:cNvCxnSpPr>
+          <p:nvPr/>
+        </p:nvCxnSpPr>
+        <p:spPr>
+          <a:xfrm>
+            <a:off x="1479613" y="1421332"/>
+            <a:ext cx="871538" cy="3122"/>
+          </a:xfrm>
+          <a:prstGeom prst="straightConnector1">
+            <a:avLst/>
+          </a:prstGeom>
+          <a:ln>
+            <a:tailEnd type="triangle"/>
+          </a:ln>
+        </p:spPr>
+        <p:style>
+          <a:lnRef idx="2">
+            <a:schemeClr val="accent1"/>
+          </a:lnRef>
+          <a:fillRef idx="0">
+            <a:schemeClr val="accent1"/>
+          </a:fillRef>
+          <a:effectRef idx="1">
+            <a:schemeClr val="accent1"/>
+          </a:effectRef>
+          <a:fontRef idx="minor">
+            <a:schemeClr val="tx1"/>
+          </a:fontRef>
+        </p:style>
+      </p:cxnSp>
+      <p:cxnSp>
+        <p:nvCxnSpPr>
+          <p:cNvPr id="14" name="Straight Arrow Connector 13">
+            <a:extLst>
+              <a:ext uri="{FF2B5EF4-FFF2-40B4-BE49-F238E27FC236}">
+                <a16:creationId xmlns:a16="http://schemas.microsoft.com/office/drawing/2014/main" id="{6766269A-66BB-D10C-46DE-603F6C26BAB2}"/>
+              </a:ext>
+            </a:extLst>
+          </p:cNvPr>
+          <p:cNvCxnSpPr>
+            <a:cxnSpLocks/>
+            <a:stCxn id="11" idx="3"/>
+            <a:endCxn id="7" idx="1"/>
+          </p:cNvCxnSpPr>
+          <p:nvPr/>
+        </p:nvCxnSpPr>
+        <p:spPr>
+          <a:xfrm flipV="1">
+            <a:off x="3879066" y="1418210"/>
+            <a:ext cx="774192" cy="6244"/>
+          </a:xfrm>
+          <a:prstGeom prst="straightConnector1">
+            <a:avLst/>
+          </a:prstGeom>
+          <a:ln>
+            <a:tailEnd type="triangle"/>
+          </a:ln>
+        </p:spPr>
+        <p:style>
+          <a:lnRef idx="2">
+            <a:schemeClr val="accent1"/>
+          </a:lnRef>
+          <a:fillRef idx="0">
+            <a:schemeClr val="accent1"/>
+          </a:fillRef>
+          <a:effectRef idx="1">
+            <a:schemeClr val="accent1"/>
+          </a:effectRef>
+          <a:fontRef idx="minor">
+            <a:schemeClr val="tx1"/>
+          </a:fontRef>
+        </p:style>
+      </p:cxnSp>
+      <p:sp>
+        <p:nvSpPr>
+          <p:cNvPr id="15" name="TextBox 14">
+            <a:extLst>
+              <a:ext uri="{FF2B5EF4-FFF2-40B4-BE49-F238E27FC236}">
+                <a16:creationId xmlns:a16="http://schemas.microsoft.com/office/drawing/2014/main" id="{5B001659-4A4A-5C42-4DF8-6A695BF115AC}"/>
+              </a:ext>
+            </a:extLst>
+          </p:cNvPr>
+          <p:cNvSpPr txBox="1"/>
+          <p:nvPr/>
+        </p:nvSpPr>
+        <p:spPr>
+          <a:xfrm>
+            <a:off x="1430655" y="1195191"/>
+            <a:ext cx="948118" cy="261610"/>
+          </a:xfrm>
+          <a:prstGeom prst="rect">
+            <a:avLst/>
+          </a:prstGeom>
+          <a:noFill/>
+        </p:spPr>
+        <p:txBody>
+          <a:bodyPr wrap="square">
+            <a:spAutoFit/>
+          </a:bodyPr>
+          <a:lstStyle/>
+          <a:p>
+            <a:r>
+              <a:rPr lang="en-US" sz="1100" dirty="0">
+                <a:latin typeface="Times New Roman" panose="02020603050405020304" pitchFamily="18" charset="0"/>
+                <a:cs typeface="Times New Roman" panose="02020603050405020304" pitchFamily="18" charset="0"/>
+              </a:rPr>
+              <a:t>Voxel</a:t>
+            </a:r>
+            <a:endParaRPr lang="en-US" sz="1200" dirty="0">
+              <a:latin typeface="Times New Roman" panose="02020603050405020304" pitchFamily="18" charset="0"/>
+              <a:cs typeface="Times New Roman" panose="02020603050405020304" pitchFamily="18" charset="0"/>
+            </a:endParaRPr>
+          </a:p>
+        </p:txBody>
+      </p:sp>
+      <p:sp>
+        <p:nvSpPr>
+          <p:cNvPr id="21" name="TextBox 20">
+            <a:extLst>
+              <a:ext uri="{FF2B5EF4-FFF2-40B4-BE49-F238E27FC236}">
+                <a16:creationId xmlns:a16="http://schemas.microsoft.com/office/drawing/2014/main" id="{A9D9C381-5C7F-B54B-3E49-9E8AC3E6F4C3}"/>
+              </a:ext>
+            </a:extLst>
+          </p:cNvPr>
+          <p:cNvSpPr txBox="1"/>
+          <p:nvPr/>
+        </p:nvSpPr>
+        <p:spPr>
+          <a:xfrm>
+            <a:off x="1447708" y="1409885"/>
+            <a:ext cx="940879" cy="430887"/>
+          </a:xfrm>
+          <a:prstGeom prst="rect">
+            <a:avLst/>
+          </a:prstGeom>
+          <a:noFill/>
+        </p:spPr>
+        <p:txBody>
+          <a:bodyPr wrap="square">
+            <a:spAutoFit/>
+          </a:bodyPr>
+          <a:lstStyle/>
+          <a:p>
+            <a:r>
+              <a:rPr lang="en-US" sz="1100" dirty="0">
+                <a:latin typeface="Times New Roman" panose="02020603050405020304" pitchFamily="18" charset="0"/>
+                <a:cs typeface="Times New Roman" panose="02020603050405020304" pitchFamily="18" charset="0"/>
+              </a:rPr>
+              <a:t>Coordinate</a:t>
+            </a:r>
+            <a:br>
+              <a:rPr lang="en-US" sz="1100" dirty="0">
+                <a:latin typeface="Times New Roman" panose="02020603050405020304" pitchFamily="18" charset="0"/>
+                <a:cs typeface="Times New Roman" panose="02020603050405020304" pitchFamily="18" charset="0"/>
+              </a:rPr>
+            </a:br>
+            <a:r>
+              <a:rPr lang="en-US" sz="1100" dirty="0">
+                <a:latin typeface="Times New Roman" panose="02020603050405020304" pitchFamily="18" charset="0"/>
+                <a:cs typeface="Times New Roman" panose="02020603050405020304" pitchFamily="18" charset="0"/>
+              </a:rPr>
+              <a:t>Intensity</a:t>
+            </a:r>
+          </a:p>
+        </p:txBody>
+      </p:sp>
+      <p:cxnSp>
+        <p:nvCxnSpPr>
+          <p:cNvPr id="36" name="Straight Arrow Connector 35">
+            <a:extLst>
+              <a:ext uri="{FF2B5EF4-FFF2-40B4-BE49-F238E27FC236}">
+                <a16:creationId xmlns:a16="http://schemas.microsoft.com/office/drawing/2014/main" id="{FBFD4AEC-4AF0-28E0-D4AC-CE1E96605F3F}"/>
+              </a:ext>
+            </a:extLst>
+          </p:cNvPr>
+          <p:cNvCxnSpPr>
+            <a:cxnSpLocks/>
+            <a:stCxn id="7" idx="3"/>
+            <a:endCxn id="25" idx="1"/>
+          </p:cNvCxnSpPr>
+          <p:nvPr/>
+        </p:nvCxnSpPr>
+        <p:spPr>
+          <a:xfrm>
+            <a:off x="6173343" y="1418210"/>
+            <a:ext cx="1365401" cy="3122"/>
+          </a:xfrm>
+          <a:prstGeom prst="straightConnector1">
+            <a:avLst/>
+          </a:prstGeom>
+          <a:ln>
+            <a:tailEnd type="triangle"/>
+          </a:ln>
+        </p:spPr>
+        <p:style>
+          <a:lnRef idx="2">
+            <a:schemeClr val="accent1"/>
+          </a:lnRef>
+          <a:fillRef idx="0">
+            <a:schemeClr val="accent1"/>
+          </a:fillRef>
+          <a:effectRef idx="1">
+            <a:schemeClr val="accent1"/>
+          </a:effectRef>
+          <a:fontRef idx="minor">
+            <a:schemeClr val="tx1"/>
+          </a:fontRef>
+        </p:style>
+      </p:cxnSp>
+      <p:cxnSp>
+        <p:nvCxnSpPr>
+          <p:cNvPr id="59" name="Straight Arrow Connector 58">
+            <a:extLst>
+              <a:ext uri="{FF2B5EF4-FFF2-40B4-BE49-F238E27FC236}">
+                <a16:creationId xmlns:a16="http://schemas.microsoft.com/office/drawing/2014/main" id="{0853A568-6A0A-FB10-1CC2-1BA4A67C83D4}"/>
+              </a:ext>
+            </a:extLst>
+          </p:cNvPr>
+          <p:cNvCxnSpPr>
+            <a:cxnSpLocks/>
+            <a:stCxn id="25" idx="3"/>
+            <a:endCxn id="37" idx="1"/>
+          </p:cNvCxnSpPr>
+          <p:nvPr/>
+        </p:nvCxnSpPr>
+        <p:spPr>
+          <a:xfrm>
+            <a:off x="9561928" y="1421332"/>
+            <a:ext cx="782984" cy="3725"/>
+          </a:xfrm>
+          <a:prstGeom prst="straightConnector1">
+            <a:avLst/>
+          </a:prstGeom>
+          <a:ln>
+            <a:tailEnd type="triangle"/>
+          </a:ln>
+        </p:spPr>
+        <p:style>
+          <a:lnRef idx="2">
+            <a:schemeClr val="accent1"/>
+          </a:lnRef>
+          <a:fillRef idx="0">
+            <a:schemeClr val="accent1"/>
+          </a:fillRef>
+          <a:effectRef idx="1">
+            <a:schemeClr val="accent1"/>
+          </a:effectRef>
+          <a:fontRef idx="minor">
+            <a:schemeClr val="tx1"/>
+          </a:fontRef>
+        </p:style>
+      </p:cxnSp>
+      <p:sp>
+        <p:nvSpPr>
+          <p:cNvPr id="63" name="TextBox 62">
+            <a:extLst>
+              <a:ext uri="{FF2B5EF4-FFF2-40B4-BE49-F238E27FC236}">
+                <a16:creationId xmlns:a16="http://schemas.microsoft.com/office/drawing/2014/main" id="{DAD5CE3C-E78F-7543-1379-EB3FEA28603F}"/>
+              </a:ext>
+            </a:extLst>
+          </p:cNvPr>
+          <p:cNvSpPr txBox="1"/>
+          <p:nvPr/>
+        </p:nvSpPr>
+        <p:spPr>
+          <a:xfrm>
+            <a:off x="9590855" y="1156599"/>
+            <a:ext cx="730843" cy="261610"/>
+          </a:xfrm>
+          <a:prstGeom prst="rect">
+            <a:avLst/>
+          </a:prstGeom>
+          <a:noFill/>
+        </p:spPr>
+        <p:txBody>
+          <a:bodyPr wrap="square">
+            <a:spAutoFit/>
+          </a:bodyPr>
+          <a:lstStyle/>
+          <a:p>
+            <a:r>
+              <a:rPr lang="en-US" sz="1100" dirty="0">
+                <a:latin typeface="Times New Roman" panose="02020603050405020304" pitchFamily="18" charset="0"/>
+                <a:cs typeface="Times New Roman" panose="02020603050405020304" pitchFamily="18" charset="0"/>
+              </a:rPr>
+              <a:t>G=(V,E)</a:t>
+            </a:r>
+          </a:p>
+        </p:txBody>
+      </p:sp>
+      <p:sp>
+        <p:nvSpPr>
+          <p:cNvPr id="89" name="TextBox 88">
+            <a:extLst>
+              <a:ext uri="{FF2B5EF4-FFF2-40B4-BE49-F238E27FC236}">
+                <a16:creationId xmlns:a16="http://schemas.microsoft.com/office/drawing/2014/main" id="{D0DE1C14-2D00-815D-5BDC-871EE29DD089}"/>
+              </a:ext>
+            </a:extLst>
+          </p:cNvPr>
+          <p:cNvSpPr txBox="1"/>
+          <p:nvPr/>
+        </p:nvSpPr>
+        <p:spPr>
+          <a:xfrm>
+            <a:off x="1034405" y="3446711"/>
+            <a:ext cx="1818759" cy="253916"/>
+          </a:xfrm>
+          <a:prstGeom prst="rect">
+            <a:avLst/>
+          </a:prstGeom>
+          <a:noFill/>
+        </p:spPr>
+        <p:txBody>
+          <a:bodyPr wrap="square">
+            <a:spAutoFit/>
+          </a:bodyPr>
+          <a:lstStyle/>
+          <a:p>
+            <a:r>
+              <a:rPr lang="en-US" sz="1000" dirty="0">
+                <a:latin typeface="Times New Roman" panose="02020603050405020304" pitchFamily="18" charset="0"/>
+                <a:cs typeface="Times New Roman" panose="02020603050405020304" pitchFamily="18" charset="0"/>
+              </a:rPr>
+              <a:t>F</a:t>
+            </a:r>
+            <a:r>
+              <a:rPr lang="pl-PL" sz="1000" dirty="0">
+                <a:latin typeface="Times New Roman" panose="02020603050405020304" pitchFamily="18" charset="0"/>
+                <a:cs typeface="Times New Roman" panose="02020603050405020304" pitchFamily="18" charset="0"/>
+              </a:rPr>
+              <a:t>_i(k) = </a:t>
+            </a:r>
+            <a:r>
+              <a:rPr lang="en-US" sz="1000" dirty="0">
+                <a:latin typeface="Times New Roman" panose="02020603050405020304" pitchFamily="18" charset="0"/>
+                <a:cs typeface="Times New Roman" panose="02020603050405020304" pitchFamily="18" charset="0"/>
+              </a:rPr>
+              <a:t>{f_1(k),…,</a:t>
+            </a:r>
+            <a:r>
+              <a:rPr lang="en-US" sz="1000" dirty="0" err="1">
+                <a:latin typeface="Times New Roman" panose="02020603050405020304" pitchFamily="18" charset="0"/>
+                <a:cs typeface="Times New Roman" panose="02020603050405020304" pitchFamily="18" charset="0"/>
+              </a:rPr>
+              <a:t>f_m</a:t>
+            </a:r>
+            <a:r>
+              <a:rPr lang="en-US" sz="1000" dirty="0">
+                <a:latin typeface="Times New Roman" panose="02020603050405020304" pitchFamily="18" charset="0"/>
+                <a:cs typeface="Times New Roman" panose="02020603050405020304" pitchFamily="18" charset="0"/>
+              </a:rPr>
+              <a:t>(k)}</a:t>
+            </a:r>
+          </a:p>
+        </p:txBody>
+      </p:sp>
+      <p:cxnSp>
+        <p:nvCxnSpPr>
+          <p:cNvPr id="170" name="Connector: Elbow 169">
+            <a:extLst>
+              <a:ext uri="{FF2B5EF4-FFF2-40B4-BE49-F238E27FC236}">
+                <a16:creationId xmlns:a16="http://schemas.microsoft.com/office/drawing/2014/main" id="{FD36B108-F3E6-9FFA-245D-2CECB5C3FF79}"/>
+              </a:ext>
+            </a:extLst>
+          </p:cNvPr>
+          <p:cNvCxnSpPr>
+            <a:cxnSpLocks/>
+          </p:cNvCxnSpPr>
+          <p:nvPr/>
+        </p:nvCxnSpPr>
+        <p:spPr>
+          <a:xfrm>
+            <a:off x="6173343" y="1828315"/>
+            <a:ext cx="1497551" cy="1213977"/>
+          </a:xfrm>
+          <a:prstGeom prst="bentConnector3">
+            <a:avLst>
+              <a:gd name="adj1" fmla="val 50000"/>
+            </a:avLst>
+          </a:prstGeom>
+          <a:ln>
+            <a:tailEnd type="triangle"/>
+          </a:ln>
+        </p:spPr>
+        <p:style>
+          <a:lnRef idx="2">
+            <a:schemeClr val="accent1"/>
+          </a:lnRef>
+          <a:fillRef idx="0">
+            <a:schemeClr val="accent1"/>
+          </a:fillRef>
+          <a:effectRef idx="1">
+            <a:schemeClr val="accent1"/>
+          </a:effectRef>
+          <a:fontRef idx="minor">
+            <a:schemeClr val="tx1"/>
+          </a:fontRef>
+        </p:style>
+      </p:cxnSp>
+      <p:sp>
+        <p:nvSpPr>
+          <p:cNvPr id="189" name="TextBox 188">
+            <a:extLst>
+              <a:ext uri="{FF2B5EF4-FFF2-40B4-BE49-F238E27FC236}">
+                <a16:creationId xmlns:a16="http://schemas.microsoft.com/office/drawing/2014/main" id="{D8BC11E4-E492-B580-6C09-83E9D8A729DE}"/>
+              </a:ext>
+            </a:extLst>
+          </p:cNvPr>
+          <p:cNvSpPr txBox="1"/>
+          <p:nvPr/>
+        </p:nvSpPr>
+        <p:spPr>
+          <a:xfrm>
+            <a:off x="10024428" y="3161388"/>
+            <a:ext cx="663843" cy="261610"/>
+          </a:xfrm>
+          <a:prstGeom prst="rect">
+            <a:avLst/>
+          </a:prstGeom>
+          <a:noFill/>
+        </p:spPr>
+        <p:txBody>
+          <a:bodyPr wrap="square">
+            <a:spAutoFit/>
+          </a:bodyPr>
+          <a:lstStyle/>
+          <a:p>
+            <a:r>
+              <a:rPr lang="en-US" sz="1100" dirty="0">
+                <a:latin typeface="Times New Roman" panose="02020603050405020304" pitchFamily="18" charset="0"/>
+                <a:cs typeface="Times New Roman" panose="02020603050405020304" pitchFamily="18" charset="0"/>
+              </a:rPr>
+              <a:t>Scores</a:t>
+            </a:r>
+          </a:p>
+        </p:txBody>
+      </p:sp>
+      <p:sp>
+        <p:nvSpPr>
+          <p:cNvPr id="198" name="TextBox 197">
+            <a:extLst>
+              <a:ext uri="{FF2B5EF4-FFF2-40B4-BE49-F238E27FC236}">
+                <a16:creationId xmlns:a16="http://schemas.microsoft.com/office/drawing/2014/main" id="{671436A8-AAF1-6CFF-1A5A-3575BBE04802}"/>
+              </a:ext>
+            </a:extLst>
+          </p:cNvPr>
+          <p:cNvSpPr txBox="1"/>
+          <p:nvPr/>
+        </p:nvSpPr>
+        <p:spPr>
+          <a:xfrm>
+            <a:off x="9953420" y="3502331"/>
+            <a:ext cx="890137" cy="261610"/>
+          </a:xfrm>
+          <a:prstGeom prst="rect">
+            <a:avLst/>
+          </a:prstGeom>
+          <a:noFill/>
+        </p:spPr>
+        <p:txBody>
+          <a:bodyPr wrap="square">
+            <a:spAutoFit/>
+          </a:bodyPr>
+          <a:lstStyle/>
+          <a:p>
+            <a:r>
+              <a:rPr lang="en-US" sz="1100" dirty="0">
+                <a:latin typeface="Times New Roman" panose="02020603050405020304" pitchFamily="18" charset="0"/>
+                <a:cs typeface="Times New Roman" panose="02020603050405020304" pitchFamily="18" charset="0"/>
+              </a:rPr>
+              <a:t>Coordinates</a:t>
+            </a:r>
+          </a:p>
+        </p:txBody>
+      </p:sp>
     </p:spTree>
     <p:extLst>
       <p:ext uri="{BB962C8B-B14F-4D97-AF65-F5344CB8AC3E}">

--- a/flowchart.pptx
+++ b/flowchart.pptx
@@ -259,7 +259,7 @@
           <a:p>
             <a:fld id="{2A846C9A-3B73-4072-A1B3-7C15C8E1070C}" type="datetimeFigureOut">
               <a:rPr lang="en-US" smtClean="0"/>
-              <a:t>2/1/2026</a:t>
+              <a:t>2/5/2026</a:t>
             </a:fld>
             <a:endParaRPr lang="en-US"/>
           </a:p>
@@ -457,7 +457,7 @@
           <a:p>
             <a:fld id="{2A846C9A-3B73-4072-A1B3-7C15C8E1070C}" type="datetimeFigureOut">
               <a:rPr lang="en-US" smtClean="0"/>
-              <a:t>2/1/2026</a:t>
+              <a:t>2/5/2026</a:t>
             </a:fld>
             <a:endParaRPr lang="en-US"/>
           </a:p>
@@ -665,7 +665,7 @@
           <a:p>
             <a:fld id="{2A846C9A-3B73-4072-A1B3-7C15C8E1070C}" type="datetimeFigureOut">
               <a:rPr lang="en-US" smtClean="0"/>
-              <a:t>2/1/2026</a:t>
+              <a:t>2/5/2026</a:t>
             </a:fld>
             <a:endParaRPr lang="en-US"/>
           </a:p>
@@ -863,7 +863,7 @@
           <a:p>
             <a:fld id="{2A846C9A-3B73-4072-A1B3-7C15C8E1070C}" type="datetimeFigureOut">
               <a:rPr lang="en-US" smtClean="0"/>
-              <a:t>2/1/2026</a:t>
+              <a:t>2/5/2026</a:t>
             </a:fld>
             <a:endParaRPr lang="en-US"/>
           </a:p>
@@ -1138,7 +1138,7 @@
           <a:p>
             <a:fld id="{2A846C9A-3B73-4072-A1B3-7C15C8E1070C}" type="datetimeFigureOut">
               <a:rPr lang="en-US" smtClean="0"/>
-              <a:t>2/1/2026</a:t>
+              <a:t>2/5/2026</a:t>
             </a:fld>
             <a:endParaRPr lang="en-US"/>
           </a:p>
@@ -1403,7 +1403,7 @@
           <a:p>
             <a:fld id="{2A846C9A-3B73-4072-A1B3-7C15C8E1070C}" type="datetimeFigureOut">
               <a:rPr lang="en-US" smtClean="0"/>
-              <a:t>2/1/2026</a:t>
+              <a:t>2/5/2026</a:t>
             </a:fld>
             <a:endParaRPr lang="en-US"/>
           </a:p>
@@ -1815,7 +1815,7 @@
           <a:p>
             <a:fld id="{2A846C9A-3B73-4072-A1B3-7C15C8E1070C}" type="datetimeFigureOut">
               <a:rPr lang="en-US" smtClean="0"/>
-              <a:t>2/1/2026</a:t>
+              <a:t>2/5/2026</a:t>
             </a:fld>
             <a:endParaRPr lang="en-US"/>
           </a:p>
@@ -1956,7 +1956,7 @@
           <a:p>
             <a:fld id="{2A846C9A-3B73-4072-A1B3-7C15C8E1070C}" type="datetimeFigureOut">
               <a:rPr lang="en-US" smtClean="0"/>
-              <a:t>2/1/2026</a:t>
+              <a:t>2/5/2026</a:t>
             </a:fld>
             <a:endParaRPr lang="en-US"/>
           </a:p>
@@ -2069,7 +2069,7 @@
           <a:p>
             <a:fld id="{2A846C9A-3B73-4072-A1B3-7C15C8E1070C}" type="datetimeFigureOut">
               <a:rPr lang="en-US" smtClean="0"/>
-              <a:t>2/1/2026</a:t>
+              <a:t>2/5/2026</a:t>
             </a:fld>
             <a:endParaRPr lang="en-US"/>
           </a:p>
@@ -2380,7 +2380,7 @@
           <a:p>
             <a:fld id="{2A846C9A-3B73-4072-A1B3-7C15C8E1070C}" type="datetimeFigureOut">
               <a:rPr lang="en-US" smtClean="0"/>
-              <a:t>2/1/2026</a:t>
+              <a:t>2/5/2026</a:t>
             </a:fld>
             <a:endParaRPr lang="en-US"/>
           </a:p>
@@ -2668,7 +2668,7 @@
           <a:p>
             <a:fld id="{2A846C9A-3B73-4072-A1B3-7C15C8E1070C}" type="datetimeFigureOut">
               <a:rPr lang="en-US" smtClean="0"/>
-              <a:t>2/1/2026</a:t>
+              <a:t>2/5/2026</a:t>
             </a:fld>
             <a:endParaRPr lang="en-US"/>
           </a:p>
@@ -2909,7 +2909,7 @@
           <a:p>
             <a:fld id="{2A846C9A-3B73-4072-A1B3-7C15C8E1070C}" type="datetimeFigureOut">
               <a:rPr lang="en-US" smtClean="0"/>
-              <a:t>2/1/2026</a:t>
+              <a:t>2/5/2026</a:t>
             </a:fld>
             <a:endParaRPr lang="en-US"/>
           </a:p>
@@ -3340,8 +3340,8 @@
         </p:nvSpPr>
         <p:spPr>
           <a:xfrm>
-            <a:off x="2562859" y="2505455"/>
-            <a:ext cx="2444545" cy="2551173"/>
+            <a:off x="2597953" y="2376555"/>
+            <a:ext cx="2444545" cy="2680073"/>
           </a:xfrm>
           <a:prstGeom prst="roundRect">
             <a:avLst/>
@@ -3365,6 +3365,7 @@
           <a:bodyPr rtlCol="0" anchor="ctr"/>
           <a:lstStyle/>
           <a:p>
+            <a:pPr algn="ctr"/>
             <a:r>
               <a:rPr lang="en-US" sz="1400" b="1" dirty="0">
                 <a:latin typeface="Times New Roman" panose="02020603050405020304" pitchFamily="18" charset="0"/>
@@ -3468,6 +3469,7 @@
           <a:bodyPr rtlCol="0" anchor="ctr"/>
           <a:lstStyle/>
           <a:p>
+            <a:pPr algn="ctr"/>
             <a:r>
               <a:rPr lang="en-US" sz="1400" b="1" dirty="0">
                 <a:latin typeface="Times New Roman" panose="02020603050405020304" pitchFamily="18" charset="0"/>
@@ -3482,7 +3484,7 @@
                 <a:latin typeface="Times New Roman" panose="02020603050405020304" pitchFamily="18" charset="0"/>
                 <a:cs typeface="Times New Roman" panose="02020603050405020304" pitchFamily="18" charset="0"/>
               </a:rPr>
-              <a:t>5D CycIF Volume     V (T, C, Z, Y, X)     Parameters: r, R, </a:t>
+              <a:t>5D CycIF Volume     V (t, c, z, y, x)     Parameters: r, </a:t>
             </a:r>
             <a:r>
               <a:rPr lang="el-GR" sz="1200" dirty="0">
@@ -3537,6 +3539,7 @@
           <a:bodyPr rtlCol="0" anchor="ctr"/>
           <a:lstStyle/>
           <a:p>
+            <a:pPr algn="ctr"/>
             <a:r>
               <a:rPr lang="en-US" sz="1400" b="1" dirty="0">
                 <a:latin typeface="Times New Roman" panose="02020603050405020304" pitchFamily="18" charset="0"/>
@@ -3595,6 +3598,7 @@
           <a:bodyPr rtlCol="0" anchor="ctr"/>
           <a:lstStyle/>
           <a:p>
+            <a:pPr algn="ctr"/>
             <a:r>
               <a:rPr lang="en-US" sz="1400" b="1" dirty="0">
                 <a:latin typeface="Times New Roman" panose="02020603050405020304" pitchFamily="18" charset="0"/>
@@ -3612,11 +3616,25 @@
               <a:t>Group biomarkers into category </a:t>
             </a:r>
             <a:r>
+              <a:rPr lang="en-US" sz="1400" dirty="0" err="1">
+                <a:latin typeface="Times New Roman" panose="02020603050405020304" pitchFamily="18" charset="0"/>
+                <a:cs typeface="Times New Roman" panose="02020603050405020304" pitchFamily="18" charset="0"/>
+              </a:rPr>
+              <a:t>c</a:t>
+            </a:r>
+            <a:r>
               <a:rPr lang="en-US" sz="1200" dirty="0" err="1">
                 <a:latin typeface="Times New Roman" panose="02020603050405020304" pitchFamily="18" charset="0"/>
                 <a:cs typeface="Times New Roman" panose="02020603050405020304" pitchFamily="18" charset="0"/>
               </a:rPr>
-              <a:t>C_k</a:t>
+              <a:t>_</a:t>
+            </a:r>
+            <a:r>
+              <a:rPr lang="en-US" sz="1050" dirty="0" err="1">
+                <a:latin typeface="Times New Roman" panose="02020603050405020304" pitchFamily="18" charset="0"/>
+                <a:cs typeface="Times New Roman" panose="02020603050405020304" pitchFamily="18" charset="0"/>
+              </a:rPr>
+              <a:t>k</a:t>
             </a:r>
             <a:endParaRPr lang="en-US" sz="1200" dirty="0">
               <a:latin typeface="Times New Roman" panose="02020603050405020304" pitchFamily="18" charset="0"/>
@@ -3639,7 +3657,7 @@
         </p:nvSpPr>
         <p:spPr>
           <a:xfrm>
-            <a:off x="3792104" y="1175078"/>
+            <a:off x="3831136" y="1175553"/>
             <a:ext cx="948117" cy="261610"/>
           </a:xfrm>
           <a:prstGeom prst="rect">
@@ -3706,6 +3724,7 @@
           <a:bodyPr rtlCol="0" anchor="ctr"/>
           <a:lstStyle/>
           <a:p>
+            <a:pPr algn="ctr"/>
             <a:r>
               <a:rPr lang="en-US" sz="1400" b="1" dirty="0">
                 <a:latin typeface="Times New Roman" panose="02020603050405020304" pitchFamily="18" charset="0"/>
@@ -3811,8 +3830,8 @@
         </p:nvSpPr>
         <p:spPr>
           <a:xfrm>
-            <a:off x="6173343" y="1429463"/>
-            <a:ext cx="1307488" cy="430887"/>
+            <a:off x="6221802" y="1439006"/>
+            <a:ext cx="1307488" cy="276999"/>
           </a:xfrm>
           <a:prstGeom prst="rect">
             <a:avLst/>
@@ -3826,34 +3845,67 @@
           <a:lstStyle/>
           <a:p>
             <a:r>
+              <a:rPr lang="en-US" sz="1200" b="1" dirty="0" err="1">
+                <a:latin typeface="Times New Roman" panose="02020603050405020304" pitchFamily="18" charset="0"/>
+                <a:cs typeface="Times New Roman" panose="02020603050405020304" pitchFamily="18" charset="0"/>
+              </a:rPr>
+              <a:t>f_</a:t>
+            </a:r>
+            <a:r>
+              <a:rPr lang="en-US" sz="1100" dirty="0" err="1">
+                <a:latin typeface="Times New Roman" panose="02020603050405020304" pitchFamily="18" charset="0"/>
+                <a:cs typeface="Times New Roman" panose="02020603050405020304" pitchFamily="18" charset="0"/>
+              </a:rPr>
+              <a:t>i</a:t>
+            </a:r>
+            <a:r>
               <a:rPr lang="en-US" sz="1100" dirty="0">
                 <a:latin typeface="Times New Roman" panose="02020603050405020304" pitchFamily="18" charset="0"/>
                 <a:cs typeface="Times New Roman" panose="02020603050405020304" pitchFamily="18" charset="0"/>
               </a:rPr>
-              <a:t>Fi​=[xi​,</a:t>
-            </a:r>
-            <a:r>
-              <a:rPr lang="en-US" sz="1100" dirty="0" err="1">
-                <a:latin typeface="Times New Roman" panose="02020603050405020304" pitchFamily="18" charset="0"/>
-                <a:cs typeface="Times New Roman" panose="02020603050405020304" pitchFamily="18" charset="0"/>
-              </a:rPr>
-              <a:t>Ii</a:t>
+              <a:t>​=[</a:t>
+            </a:r>
+            <a:r>
+              <a:rPr lang="en-US" sz="1200" b="1" dirty="0">
+                <a:latin typeface="Times New Roman" panose="02020603050405020304" pitchFamily="18" charset="0"/>
+                <a:cs typeface="Times New Roman" panose="02020603050405020304" pitchFamily="18" charset="0"/>
+              </a:rPr>
+              <a:t>x</a:t>
             </a:r>
             <a:r>
               <a:rPr lang="en-US" sz="1100" dirty="0">
                 <a:latin typeface="Times New Roman" panose="02020603050405020304" pitchFamily="18" charset="0"/>
                 <a:cs typeface="Times New Roman" panose="02020603050405020304" pitchFamily="18" charset="0"/>
               </a:rPr>
-              <a:t>​,ci​]</a:t>
-            </a:r>
-          </a:p>
-          <a:p>
+              <a:t>i​,</a:t>
+            </a:r>
+            <a:r>
+              <a:rPr lang="en-US" sz="1200" b="1" dirty="0">
+                <a:latin typeface="Times New Roman" panose="02020603050405020304" pitchFamily="18" charset="0"/>
+                <a:cs typeface="Times New Roman" panose="02020603050405020304" pitchFamily="18" charset="0"/>
+              </a:rPr>
+              <a:t>i</a:t>
+            </a:r>
             <a:r>
               <a:rPr lang="en-US" sz="1100" dirty="0">
                 <a:latin typeface="Times New Roman" panose="02020603050405020304" pitchFamily="18" charset="0"/>
                 <a:cs typeface="Times New Roman" panose="02020603050405020304" pitchFamily="18" charset="0"/>
               </a:rPr>
-              <a:t>Eᵢ = [xᵢ, wᵢ, ci] </a:t>
+              <a:t>i​,</a:t>
+            </a:r>
+            <a:r>
+              <a:rPr lang="en-US" sz="1200" b="1" dirty="0">
+                <a:latin typeface="Times New Roman" panose="02020603050405020304" pitchFamily="18" charset="0"/>
+                <a:cs typeface="Times New Roman" panose="02020603050405020304" pitchFamily="18" charset="0"/>
+              </a:rPr>
+              <a:t>c</a:t>
+            </a:r>
+            <a:r>
+              <a:rPr lang="en-US" sz="1100" dirty="0">
+                <a:latin typeface="Times New Roman" panose="02020603050405020304" pitchFamily="18" charset="0"/>
+                <a:cs typeface="Times New Roman" panose="02020603050405020304" pitchFamily="18" charset="0"/>
+              </a:rPr>
+              <a:t>i​]</a:t>
             </a:r>
           </a:p>
         </p:txBody>
@@ -3872,8 +3924,8 @@
         </p:nvSpPr>
         <p:spPr>
           <a:xfrm>
-            <a:off x="10344912" y="1015587"/>
-            <a:ext cx="1664208" cy="818940"/>
+            <a:off x="10479024" y="1015587"/>
+            <a:ext cx="1530096" cy="818940"/>
           </a:xfrm>
           <a:prstGeom prst="rect">
             <a:avLst/>
@@ -3897,6 +3949,7 @@
           <a:bodyPr rtlCol="0" anchor="ctr"/>
           <a:lstStyle/>
           <a:p>
+            <a:pPr algn="ctr"/>
             <a:r>
               <a:rPr lang="en-US" sz="1400" b="1" dirty="0">
                 <a:latin typeface="Times New Roman" panose="02020603050405020304" pitchFamily="18" charset="0"/>
@@ -3974,6 +4027,13 @@
           </a:p>
           <a:p>
             <a:r>
+              <a:rPr lang="en-US" sz="1100" dirty="0">
+                <a:latin typeface="Times New Roman" panose="02020603050405020304" pitchFamily="18" charset="0"/>
+                <a:cs typeface="Times New Roman" panose="02020603050405020304" pitchFamily="18" charset="0"/>
+              </a:rPr>
+              <a:t>      </a:t>
+            </a:r>
+            <a:r>
               <a:rPr lang="pl-PL" sz="1100" dirty="0">
                 <a:latin typeface="Times New Roman" panose="02020603050405020304" pitchFamily="18" charset="0"/>
                 <a:cs typeface="Times New Roman" panose="02020603050405020304" pitchFamily="18" charset="0"/>
@@ -4005,12 +4065,12 @@
         </p:nvCxnSpPr>
         <p:spPr>
           <a:xfrm rot="5400000">
-            <a:off x="5300566" y="-2895125"/>
-            <a:ext cx="1146798" cy="10606102"/>
+            <a:off x="5334094" y="-2928653"/>
+            <a:ext cx="1146798" cy="10673158"/>
           </a:xfrm>
           <a:prstGeom prst="bentConnector3">
             <a:avLst>
-              <a:gd name="adj1" fmla="val 43621"/>
+              <a:gd name="adj1" fmla="val 41229"/>
             </a:avLst>
           </a:prstGeom>
           <a:ln>
@@ -4061,46 +4121,11 @@
           <a:lstStyle/>
           <a:p>
             <a:r>
-              <a:rPr lang="en-US" sz="1200" dirty="0" err="1">
-                <a:latin typeface="Times New Roman" panose="02020603050405020304" pitchFamily="18" charset="0"/>
-                <a:cs typeface="Times New Roman" panose="02020603050405020304" pitchFamily="18" charset="0"/>
-              </a:rPr>
-              <a:t>Z_i</a:t>
-            </a:r>
-            <a:r>
               <a:rPr lang="en-US" sz="1200" dirty="0">
                 <a:latin typeface="Times New Roman" panose="02020603050405020304" pitchFamily="18" charset="0"/>
                 <a:cs typeface="Times New Roman" panose="02020603050405020304" pitchFamily="18" charset="0"/>
               </a:rPr>
-              <a:t> = GAT(</a:t>
-            </a:r>
-            <a:r>
-              <a:rPr lang="en-US" sz="1200" dirty="0" err="1">
-                <a:latin typeface="Times New Roman" panose="02020603050405020304" pitchFamily="18" charset="0"/>
-                <a:cs typeface="Times New Roman" panose="02020603050405020304" pitchFamily="18" charset="0"/>
-              </a:rPr>
-              <a:t>F_i</a:t>
-            </a:r>
-            <a:r>
-              <a:rPr lang="en-US" sz="1200" dirty="0">
-                <a:latin typeface="Times New Roman" panose="02020603050405020304" pitchFamily="18" charset="0"/>
-                <a:cs typeface="Times New Roman" panose="02020603050405020304" pitchFamily="18" charset="0"/>
-              </a:rPr>
-              <a:t>, </a:t>
-            </a:r>
-            <a:r>
-              <a:rPr lang="en-US" sz="1200" dirty="0" err="1">
-                <a:latin typeface="Times New Roman" panose="02020603050405020304" pitchFamily="18" charset="0"/>
-                <a:cs typeface="Times New Roman" panose="02020603050405020304" pitchFamily="18" charset="0"/>
-              </a:rPr>
-              <a:t>E_i</a:t>
-            </a:r>
-            <a:r>
-              <a:rPr lang="en-US" sz="1200" dirty="0">
-                <a:latin typeface="Times New Roman" panose="02020603050405020304" pitchFamily="18" charset="0"/>
-                <a:cs typeface="Times New Roman" panose="02020603050405020304" pitchFamily="18" charset="0"/>
-              </a:rPr>
-              <a:t>) </a:t>
+              <a:t>Z = GAT(N, E) </a:t>
             </a:r>
           </a:p>
         </p:txBody>
@@ -4119,7 +4144,7 @@
         </p:nvSpPr>
         <p:spPr>
           <a:xfrm>
-            <a:off x="3033949" y="2805376"/>
+            <a:off x="3069043" y="2805376"/>
             <a:ext cx="1900007" cy="546906"/>
           </a:xfrm>
           <a:prstGeom prst="rect">
@@ -4144,6 +4169,7 @@
           <a:bodyPr rtlCol="0" anchor="ctr"/>
           <a:lstStyle/>
           <a:p>
+            <a:pPr algn="ctr"/>
             <a:r>
               <a:rPr lang="en-US" sz="1400" b="1" dirty="0">
                 <a:latin typeface="Times New Roman" panose="02020603050405020304" pitchFamily="18" charset="0"/>
@@ -4194,7 +4220,7 @@
         </p:nvSpPr>
         <p:spPr>
           <a:xfrm>
-            <a:off x="2965945" y="3611919"/>
+            <a:off x="3001039" y="3611919"/>
             <a:ext cx="1971190" cy="546906"/>
           </a:xfrm>
           <a:prstGeom prst="rect">
@@ -4219,6 +4245,7 @@
           <a:bodyPr rtlCol="0" anchor="ctr"/>
           <a:lstStyle/>
           <a:p>
+            <a:pPr algn="ctr"/>
             <a:r>
               <a:rPr lang="en-US" sz="1400" b="1" dirty="0">
                 <a:latin typeface="Times New Roman" panose="02020603050405020304" pitchFamily="18" charset="0"/>
@@ -4289,7 +4316,7 @@
         </p:nvSpPr>
         <p:spPr>
           <a:xfrm>
-            <a:off x="3033948" y="4418462"/>
+            <a:off x="3069042" y="4418462"/>
             <a:ext cx="1900005" cy="439357"/>
           </a:xfrm>
           <a:prstGeom prst="rect">
@@ -4314,6 +4341,7 @@
           <a:bodyPr rtlCol="0" anchor="ctr"/>
           <a:lstStyle/>
           <a:p>
+            <a:pPr algn="ctr"/>
             <a:r>
               <a:rPr lang="en-US" sz="1400" b="1" dirty="0">
                 <a:latin typeface="Times New Roman" panose="02020603050405020304" pitchFamily="18" charset="0"/>
@@ -4355,7 +4383,7 @@
         </p:nvCxnSpPr>
         <p:spPr>
           <a:xfrm rot="10800000" flipH="1">
-            <a:off x="3033947" y="3078829"/>
+            <a:off x="3069041" y="3078829"/>
             <a:ext cx="1" cy="1559312"/>
           </a:xfrm>
           <a:prstGeom prst="bentConnector3">
@@ -4396,7 +4424,7 @@
         </p:nvSpPr>
         <p:spPr>
           <a:xfrm rot="16200000">
-            <a:off x="1679703" y="3717002"/>
+            <a:off x="1714797" y="3717002"/>
             <a:ext cx="1973856" cy="307777"/>
           </a:xfrm>
           <a:prstGeom prst="rect">
@@ -4437,7 +4465,7 @@
         </p:nvCxnSpPr>
         <p:spPr>
           <a:xfrm>
-            <a:off x="3949699" y="3386389"/>
+            <a:off x="3984793" y="3386389"/>
             <a:ext cx="1841" cy="225530"/>
           </a:xfrm>
           <a:prstGeom prst="straightConnector1">
@@ -4478,7 +4506,7 @@
         </p:nvCxnSpPr>
         <p:spPr>
           <a:xfrm>
-            <a:off x="3954445" y="4158825"/>
+            <a:off x="3989539" y="4158825"/>
             <a:ext cx="0" cy="259637"/>
           </a:xfrm>
           <a:prstGeom prst="straightConnector1">
@@ -4514,13 +4542,12 @@
           </p:cNvPr>
           <p:cNvCxnSpPr>
             <a:cxnSpLocks/>
-            <a:stCxn id="62" idx="3"/>
           </p:cNvCxnSpPr>
           <p:nvPr/>
         </p:nvCxnSpPr>
         <p:spPr>
           <a:xfrm>
-            <a:off x="1086278" y="3429000"/>
+            <a:off x="1104566" y="3429000"/>
             <a:ext cx="1476581" cy="0"/>
           </a:xfrm>
           <a:prstGeom prst="straightConnector1">
@@ -4578,14 +4605,42 @@
                 <a:latin typeface="Times New Roman" panose="02020603050405020304" pitchFamily="18" charset="0"/>
                 <a:cs typeface="Times New Roman" panose="02020603050405020304" pitchFamily="18" charset="0"/>
               </a:rPr>
-              <a:t>S</a:t>
+              <a:t>s</a:t>
             </a:r>
             <a:r>
               <a:rPr lang="pl-PL" sz="1100" dirty="0">
                 <a:latin typeface="Times New Roman" panose="02020603050405020304" pitchFamily="18" charset="0"/>
                 <a:cs typeface="Times New Roman" panose="02020603050405020304" pitchFamily="18" charset="0"/>
               </a:rPr>
-              <a:t>_i(k) = σ(w_kᵀ Z_i)</a:t>
+              <a:t>_i(k) = σ(</a:t>
+            </a:r>
+            <a:r>
+              <a:rPr lang="pl-PL" sz="1100" b="1" dirty="0">
+                <a:latin typeface="Times New Roman" panose="02020603050405020304" pitchFamily="18" charset="0"/>
+                <a:cs typeface="Times New Roman" panose="02020603050405020304" pitchFamily="18" charset="0"/>
+              </a:rPr>
+              <a:t>w_</a:t>
+            </a:r>
+            <a:r>
+              <a:rPr lang="pl-PL" sz="1100" dirty="0">
+                <a:latin typeface="Times New Roman" panose="02020603050405020304" pitchFamily="18" charset="0"/>
+                <a:cs typeface="Times New Roman" panose="02020603050405020304" pitchFamily="18" charset="0"/>
+              </a:rPr>
+              <a:t>kᵀ </a:t>
+            </a:r>
+            <a:r>
+              <a:rPr lang="en-US" sz="1100" b="1" dirty="0">
+                <a:latin typeface="Times New Roman" panose="02020603050405020304" pitchFamily="18" charset="0"/>
+                <a:cs typeface="Times New Roman" panose="02020603050405020304" pitchFamily="18" charset="0"/>
+              </a:rPr>
+              <a:t>z</a:t>
+            </a:r>
+            <a:r>
+              <a:rPr lang="pl-PL" sz="1100" dirty="0">
+                <a:latin typeface="Times New Roman" panose="02020603050405020304" pitchFamily="18" charset="0"/>
+                <a:cs typeface="Times New Roman" panose="02020603050405020304" pitchFamily="18" charset="0"/>
+              </a:rPr>
+              <a:t>_i)</a:t>
             </a:r>
             <a:endParaRPr lang="en-US" sz="1100" dirty="0">
               <a:latin typeface="Times New Roman" panose="02020603050405020304" pitchFamily="18" charset="0"/>
@@ -4608,8 +4663,8 @@
         </p:nvSpPr>
         <p:spPr>
           <a:xfrm>
-            <a:off x="5426413" y="2758377"/>
-            <a:ext cx="1167046" cy="1618628"/>
+            <a:off x="5427855" y="2924910"/>
+            <a:ext cx="1176708" cy="1171696"/>
           </a:xfrm>
           <a:prstGeom prst="rect">
             <a:avLst/>
@@ -4698,8 +4753,8 @@
         </p:nvSpPr>
         <p:spPr>
           <a:xfrm>
-            <a:off x="6560406" y="3508528"/>
-            <a:ext cx="1162448" cy="261610"/>
+            <a:off x="6587314" y="3144179"/>
+            <a:ext cx="1162448" cy="307777"/>
           </a:xfrm>
           <a:prstGeom prst="rect">
             <a:avLst/>
@@ -4713,26 +4768,37 @@
           <a:lstStyle/>
           <a:p>
             <a:r>
-              <a:rPr lang="en-US" sz="1100" dirty="0">
-                <a:latin typeface="Times New Roman" panose="02020603050405020304" pitchFamily="18" charset="0"/>
-                <a:cs typeface="Times New Roman" panose="02020603050405020304" pitchFamily="18" charset="0"/>
-              </a:rPr>
-              <a:t>S</a:t>
-            </a:r>
-            <a:r>
-              <a:rPr lang="pl-PL" sz="1100" dirty="0">
-                <a:latin typeface="Times New Roman" panose="02020603050405020304" pitchFamily="18" charset="0"/>
-                <a:cs typeface="Times New Roman" panose="02020603050405020304" pitchFamily="18" charset="0"/>
-              </a:rPr>
-              <a:t>_i</a:t>
-            </a:r>
-            <a:r>
-              <a:rPr lang="en-US" sz="1100" dirty="0">
-                <a:latin typeface="Times New Roman" panose="02020603050405020304" pitchFamily="18" charset="0"/>
-                <a:cs typeface="Times New Roman" panose="02020603050405020304" pitchFamily="18" charset="0"/>
-              </a:rPr>
-              <a:t>={s_1,..,s_m}</a:t>
-            </a:r>
+              <a:rPr lang="en-US" sz="1400" b="1" dirty="0">
+                <a:latin typeface="Times New Roman" panose="02020603050405020304" pitchFamily="18" charset="0"/>
+                <a:cs typeface="Times New Roman" panose="02020603050405020304" pitchFamily="18" charset="0"/>
+              </a:rPr>
+              <a:t>s</a:t>
+            </a:r>
+            <a:r>
+              <a:rPr lang="pl-PL" sz="1400" dirty="0">
+                <a:latin typeface="Times New Roman" panose="02020603050405020304" pitchFamily="18" charset="0"/>
+                <a:cs typeface="Times New Roman" panose="02020603050405020304" pitchFamily="18" charset="0"/>
+              </a:rPr>
+              <a:t>_</a:t>
+            </a:r>
+            <a:r>
+              <a:rPr lang="en-US" sz="1400" dirty="0" err="1">
+                <a:latin typeface="Times New Roman" panose="02020603050405020304" pitchFamily="18" charset="0"/>
+                <a:cs typeface="Times New Roman" panose="02020603050405020304" pitchFamily="18" charset="0"/>
+              </a:rPr>
+              <a:t>i</a:t>
+            </a:r>
+            <a:r>
+              <a:rPr lang="en-US" sz="1400" dirty="0">
+                <a:latin typeface="Times New Roman" panose="02020603050405020304" pitchFamily="18" charset="0"/>
+                <a:cs typeface="Times New Roman" panose="02020603050405020304" pitchFamily="18" charset="0"/>
+              </a:rPr>
+              <a:t>⁽ᵏ⁾</a:t>
+            </a:r>
+            <a:endParaRPr lang="en-US" sz="1200" dirty="0">
+              <a:latin typeface="Times New Roman" panose="02020603050405020304" pitchFamily="18" charset="0"/>
+              <a:cs typeface="Times New Roman" panose="02020603050405020304" pitchFamily="18" charset="0"/>
+            </a:endParaRPr>
           </a:p>
         </p:txBody>
       </p:sp>
@@ -4751,7 +4817,7 @@
         <p:spPr>
           <a:xfrm>
             <a:off x="5000515" y="3125177"/>
-            <a:ext cx="607056" cy="600164"/>
+            <a:ext cx="607056" cy="646331"/>
           </a:xfrm>
           <a:prstGeom prst="rect">
             <a:avLst/>
@@ -4765,39 +4831,46 @@
           <a:lstStyle/>
           <a:p>
             <a:r>
-              <a:rPr lang="en-US" sz="1100" dirty="0" err="1">
-                <a:latin typeface="Times New Roman" panose="02020603050405020304" pitchFamily="18" charset="0"/>
-                <a:cs typeface="Times New Roman" panose="02020603050405020304" pitchFamily="18" charset="0"/>
-              </a:rPr>
-              <a:t>W_k</a:t>
-            </a:r>
-            <a:endParaRPr lang="en-US" sz="1100" dirty="0">
+              <a:rPr lang="en-US" sz="1200" b="1" dirty="0" err="1">
+                <a:latin typeface="Times New Roman" panose="02020603050405020304" pitchFamily="18" charset="0"/>
+                <a:cs typeface="Times New Roman" panose="02020603050405020304" pitchFamily="18" charset="0"/>
+              </a:rPr>
+              <a:t>w_k</a:t>
+            </a:r>
+            <a:endParaRPr lang="en-US" sz="1200" b="1" dirty="0">
               <a:latin typeface="Times New Roman" panose="02020603050405020304" pitchFamily="18" charset="0"/>
               <a:cs typeface="Times New Roman" panose="02020603050405020304" pitchFamily="18" charset="0"/>
             </a:endParaRPr>
           </a:p>
           <a:p>
             <a:r>
-              <a:rPr lang="en-US" sz="1100" dirty="0">
+              <a:rPr lang="en-US" sz="1200" dirty="0">
                 <a:latin typeface="Times New Roman" panose="02020603050405020304" pitchFamily="18" charset="0"/>
                 <a:cs typeface="Times New Roman" panose="02020603050405020304" pitchFamily="18" charset="0"/>
               </a:rPr>
               <a:t> </a:t>
             </a:r>
             <a:br>
-              <a:rPr lang="en-US" sz="1100" dirty="0">
+              <a:rPr lang="en-US" sz="1200" dirty="0">
                 <a:latin typeface="Times New Roman" panose="02020603050405020304" pitchFamily="18" charset="0"/>
                 <a:cs typeface="Times New Roman" panose="02020603050405020304" pitchFamily="18" charset="0"/>
               </a:rPr>
             </a:br>
             <a:r>
-              <a:rPr lang="pl-PL" sz="1100" dirty="0">
-                <a:latin typeface="Times New Roman" panose="02020603050405020304" pitchFamily="18" charset="0"/>
-                <a:cs typeface="Times New Roman" panose="02020603050405020304" pitchFamily="18" charset="0"/>
-              </a:rPr>
-              <a:t>Z_i</a:t>
-            </a:r>
-            <a:endParaRPr lang="en-US" sz="1100" dirty="0">
+              <a:rPr lang="en-US" sz="1200" b="1" dirty="0">
+                <a:latin typeface="Times New Roman" panose="02020603050405020304" pitchFamily="18" charset="0"/>
+                <a:cs typeface="Times New Roman" panose="02020603050405020304" pitchFamily="18" charset="0"/>
+              </a:rPr>
+              <a:t>z</a:t>
+            </a:r>
+            <a:r>
+              <a:rPr lang="pl-PL" sz="1200" b="1" dirty="0">
+                <a:latin typeface="Times New Roman" panose="02020603050405020304" pitchFamily="18" charset="0"/>
+                <a:cs typeface="Times New Roman" panose="02020603050405020304" pitchFamily="18" charset="0"/>
+              </a:rPr>
+              <a:t>_i</a:t>
+            </a:r>
+            <a:endParaRPr lang="en-US" sz="1200" b="1" dirty="0">
               <a:latin typeface="Times New Roman" panose="02020603050405020304" pitchFamily="18" charset="0"/>
               <a:cs typeface="Times New Roman" panose="02020603050405020304" pitchFamily="18" charset="0"/>
             </a:endParaRPr>
@@ -4818,8 +4891,8 @@
         </p:nvSpPr>
         <p:spPr>
           <a:xfrm>
-            <a:off x="7670894" y="2460229"/>
-            <a:ext cx="2356060" cy="2680073"/>
+            <a:off x="7670894" y="2376555"/>
+            <a:ext cx="2353534" cy="2763747"/>
           </a:xfrm>
           <a:prstGeom prst="roundRect">
             <a:avLst/>
@@ -4843,6 +4916,7 @@
           <a:bodyPr rtlCol="0" anchor="ctr"/>
           <a:lstStyle/>
           <a:p>
+            <a:pPr algn="ctr"/>
             <a:r>
               <a:rPr lang="en-US" sz="1400" b="1" dirty="0">
                 <a:latin typeface="Times New Roman" panose="02020603050405020304" pitchFamily="18" charset="0"/>
@@ -4946,6 +5020,7 @@
           <a:bodyPr rtlCol="0" anchor="ctr"/>
           <a:lstStyle/>
           <a:p>
+            <a:pPr algn="ctr"/>
             <a:r>
               <a:rPr lang="en-US" sz="1400" b="1" dirty="0">
                 <a:latin typeface="Times New Roman" panose="02020603050405020304" pitchFamily="18" charset="0"/>
@@ -4956,8 +5031,12 @@
           </a:p>
           <a:p>
             <a:r>
+              <a:rPr lang="en-US" sz="1400" b="1" dirty="0" err="1"/>
+              <a:t>i</a:t>
+            </a:r>
+            <a:r>
               <a:rPr lang="en-US" sz="1200" dirty="0"/>
-              <a:t>Iᵢⱼ⁽ᵏ⁾ = sᵢ⁽ᵏ⁾ · sⱼ⁽ᵏ⁾ · Īᵢ⁽ᵏ⁾ · Īⱼ⁽ᵏ⁾ · wij</a:t>
+              <a:t>ᵢⱼ⁽ᵏ⁾ = sᵢ⁽ᵏ⁾ · sⱼ⁽ᵏ⁾ · Īᵢ⁽ᵏ⁾ · Īⱼ⁽ᵏ⁾ · wij</a:t>
             </a:r>
             <a:endParaRPr lang="en-US" sz="900" dirty="0">
               <a:latin typeface="Times New Roman" panose="02020603050405020304" pitchFamily="18" charset="0"/>
@@ -5005,6 +5084,7 @@
           <a:bodyPr rtlCol="0" anchor="ctr"/>
           <a:lstStyle/>
           <a:p>
+            <a:pPr algn="ctr"/>
             <a:r>
               <a:rPr lang="en-US" sz="1400" b="1" dirty="0">
                 <a:latin typeface="Times New Roman" panose="02020603050405020304" pitchFamily="18" charset="0"/>
@@ -5024,7 +5104,15 @@
             </a:r>
             <a:r>
               <a:rPr lang="en-US" sz="1200" dirty="0"/>
-              <a:t>) = max { Iᵢⱼ⁽ᵏ⁾ | j ∈ Nᵣ(</a:t>
+              <a:t>) = max {</a:t>
+            </a:r>
+            <a:r>
+              <a:rPr lang="en-US" sz="1400" b="1" dirty="0" err="1"/>
+              <a:t>i</a:t>
+            </a:r>
+            <a:r>
+              <a:rPr lang="en-US" sz="1200" dirty="0"/>
+              <a:t>ᵢⱼ⁽ᵏ⁾ | j ∈ Nᵣ(</a:t>
             </a:r>
             <a:r>
               <a:rPr lang="en-US" sz="1200" dirty="0" err="1"/>
@@ -5088,6 +5176,7 @@
           <a:bodyPr rtlCol="0" anchor="ctr"/>
           <a:lstStyle/>
           <a:p>
+            <a:pPr algn="ctr"/>
             <a:r>
               <a:rPr lang="en-US" sz="1400" b="1" dirty="0">
                 <a:latin typeface="Times New Roman" panose="02020603050405020304" pitchFamily="18" charset="0"/>
@@ -5218,7 +5307,7 @@
         </p:nvCxnSpPr>
         <p:spPr>
           <a:xfrm>
-            <a:off x="5007404" y="3435250"/>
+            <a:off x="5025692" y="3435250"/>
             <a:ext cx="419009" cy="2902"/>
           </a:xfrm>
           <a:prstGeom prst="straightConnector1">
@@ -5257,8 +5346,8 @@
         </p:nvSpPr>
         <p:spPr>
           <a:xfrm>
-            <a:off x="10734513" y="2845208"/>
-            <a:ext cx="1401937" cy="1180084"/>
+            <a:off x="10838484" y="2845208"/>
+            <a:ext cx="1261390" cy="1180084"/>
           </a:xfrm>
           <a:prstGeom prst="rect">
             <a:avLst/>
@@ -5282,6 +5371,7 @@
           <a:bodyPr rtlCol="0" anchor="ctr"/>
           <a:lstStyle/>
           <a:p>
+            <a:pPr algn="ctr"/>
             <a:r>
               <a:rPr lang="en-US" sz="1400" b="1" dirty="0">
                 <a:latin typeface="Times New Roman" panose="02020603050405020304" pitchFamily="18" charset="0"/>
@@ -5302,7 +5392,7 @@
                 <a:latin typeface="Times New Roman" panose="02020603050405020304" pitchFamily="18" charset="0"/>
                 <a:cs typeface="Times New Roman" panose="02020603050405020304" pitchFamily="18" charset="0"/>
               </a:rPr>
-              <a:t>-GAT model</a:t>
+              <a:t>- GAT model</a:t>
             </a:r>
             <a:br>
               <a:rPr lang="en-US" sz="1200" dirty="0">
@@ -5315,7 +5405,7 @@
                 <a:latin typeface="Times New Roman" panose="02020603050405020304" pitchFamily="18" charset="0"/>
                 <a:cs typeface="Times New Roman" panose="02020603050405020304" pitchFamily="18" charset="0"/>
               </a:rPr>
-              <a:t>-Saliency map </a:t>
+              <a:t>- Saliency map </a:t>
             </a:r>
           </a:p>
           <a:p>
@@ -5324,7 +5414,7 @@
                 <a:latin typeface="Times New Roman" panose="02020603050405020304" pitchFamily="18" charset="0"/>
                 <a:cs typeface="Times New Roman" panose="02020603050405020304" pitchFamily="18" charset="0"/>
               </a:rPr>
-              <a:t>-ROI masks</a:t>
+              <a:t>- ROI masks</a:t>
             </a:r>
           </a:p>
         </p:txBody>
@@ -5345,8 +5435,8 @@
         </p:nvCxnSpPr>
         <p:spPr>
           <a:xfrm>
-            <a:off x="10026954" y="3462664"/>
-            <a:ext cx="707559" cy="0"/>
+            <a:off x="10024428" y="3465755"/>
+            <a:ext cx="819129" cy="0"/>
           </a:xfrm>
           <a:prstGeom prst="straightConnector1">
             <a:avLst/>
@@ -5611,7 +5701,7 @@
         <p:spPr>
           <a:xfrm>
             <a:off x="9561928" y="1421332"/>
-            <a:ext cx="782984" cy="3725"/>
+            <a:ext cx="917096" cy="3725"/>
           </a:xfrm>
           <a:prstGeom prst="straightConnector1">
             <a:avLst/>
@@ -5668,7 +5758,7 @@
                 <a:latin typeface="Times New Roman" panose="02020603050405020304" pitchFamily="18" charset="0"/>
                 <a:cs typeface="Times New Roman" panose="02020603050405020304" pitchFamily="18" charset="0"/>
               </a:rPr>
-              <a:t>G=(V,E)</a:t>
+              <a:t>Nodes</a:t>
             </a:r>
           </a:p>
         </p:txBody>
@@ -5702,35 +5792,35 @@
           <a:lstStyle/>
           <a:p>
             <a:r>
-              <a:rPr lang="en-US" sz="1000" dirty="0">
-                <a:latin typeface="Times New Roman" panose="02020603050405020304" pitchFamily="18" charset="0"/>
-                <a:cs typeface="Times New Roman" panose="02020603050405020304" pitchFamily="18" charset="0"/>
-              </a:rPr>
-              <a:t>F</a:t>
-            </a:r>
-            <a:r>
-              <a:rPr lang="pl-PL" sz="1000" dirty="0">
+              <a:rPr lang="en-US" sz="1050" b="1" dirty="0">
+                <a:latin typeface="Times New Roman" panose="02020603050405020304" pitchFamily="18" charset="0"/>
+                <a:cs typeface="Times New Roman" panose="02020603050405020304" pitchFamily="18" charset="0"/>
+              </a:rPr>
+              <a:t>f</a:t>
+            </a:r>
+            <a:r>
+              <a:rPr lang="pl-PL" sz="1050" dirty="0">
                 <a:latin typeface="Times New Roman" panose="02020603050405020304" pitchFamily="18" charset="0"/>
                 <a:cs typeface="Times New Roman" panose="02020603050405020304" pitchFamily="18" charset="0"/>
               </a:rPr>
               <a:t>_i(k) = </a:t>
             </a:r>
             <a:r>
-              <a:rPr lang="en-US" sz="1000" dirty="0">
+              <a:rPr lang="en-US" sz="1050" dirty="0">
                 <a:latin typeface="Times New Roman" panose="02020603050405020304" pitchFamily="18" charset="0"/>
                 <a:cs typeface="Times New Roman" panose="02020603050405020304" pitchFamily="18" charset="0"/>
               </a:rPr>
               <a:t>{f_1(k),…,</a:t>
             </a:r>
             <a:r>
-              <a:rPr lang="en-US" sz="1000" dirty="0" err="1">
+              <a:rPr lang="en-US" sz="1050" dirty="0" err="1">
                 <a:latin typeface="Times New Roman" panose="02020603050405020304" pitchFamily="18" charset="0"/>
                 <a:cs typeface="Times New Roman" panose="02020603050405020304" pitchFamily="18" charset="0"/>
               </a:rPr>
               <a:t>f_m</a:t>
             </a:r>
             <a:r>
-              <a:rPr lang="en-US" sz="1000" dirty="0">
+              <a:rPr lang="en-US" sz="1050" dirty="0">
                 <a:latin typeface="Times New Roman" panose="02020603050405020304" pitchFamily="18" charset="0"/>
                 <a:cs typeface="Times New Roman" panose="02020603050405020304" pitchFamily="18" charset="0"/>
               </a:rPr>
@@ -5796,7 +5886,7 @@
         </p:nvSpPr>
         <p:spPr>
           <a:xfrm>
-            <a:off x="10024428" y="3161388"/>
+            <a:off x="10024428" y="2953583"/>
             <a:ext cx="663843" cy="261610"/>
           </a:xfrm>
           <a:prstGeom prst="rect">
@@ -5835,7 +5925,7 @@
         <p:spPr>
           <a:xfrm>
             <a:off x="9953420" y="3502331"/>
-            <a:ext cx="890137" cy="261610"/>
+            <a:ext cx="969004" cy="261610"/>
           </a:xfrm>
           <a:prstGeom prst="rect">
             <a:avLst/>
@@ -5853,7 +5943,208 @@
                 <a:latin typeface="Times New Roman" panose="02020603050405020304" pitchFamily="18" charset="0"/>
                 <a:cs typeface="Times New Roman" panose="02020603050405020304" pitchFamily="18" charset="0"/>
               </a:rPr>
-              <a:t>Coordinates</a:t>
+              <a:t> Coordinates</a:t>
+            </a:r>
+          </a:p>
+        </p:txBody>
+      </p:sp>
+      <p:sp>
+        <p:nvSpPr>
+          <p:cNvPr id="5" name="TextBox 4">
+            <a:extLst>
+              <a:ext uri="{FF2B5EF4-FFF2-40B4-BE49-F238E27FC236}">
+                <a16:creationId xmlns:a16="http://schemas.microsoft.com/office/drawing/2014/main" id="{5E1A420E-AF74-BA84-ADD1-C475680263BB}"/>
+              </a:ext>
+            </a:extLst>
+          </p:cNvPr>
+          <p:cNvSpPr txBox="1"/>
+          <p:nvPr/>
+        </p:nvSpPr>
+        <p:spPr>
+          <a:xfrm>
+            <a:off x="9550322" y="1461508"/>
+            <a:ext cx="928702" cy="261610"/>
+          </a:xfrm>
+          <a:prstGeom prst="rect">
+            <a:avLst/>
+          </a:prstGeom>
+          <a:noFill/>
+        </p:spPr>
+        <p:txBody>
+          <a:bodyPr wrap="square">
+            <a:spAutoFit/>
+          </a:bodyPr>
+          <a:lstStyle/>
+          <a:p>
+            <a:r>
+              <a:rPr lang="en-US" sz="1100" dirty="0">
+                <a:latin typeface="Times New Roman" panose="02020603050405020304" pitchFamily="18" charset="0"/>
+                <a:cs typeface="Times New Roman" panose="02020603050405020304" pitchFamily="18" charset="0"/>
+              </a:rPr>
+              <a:t>Initial Edges</a:t>
+            </a:r>
+          </a:p>
+        </p:txBody>
+      </p:sp>
+      <p:sp>
+        <p:nvSpPr>
+          <p:cNvPr id="16" name="TextBox 15">
+            <a:extLst>
+              <a:ext uri="{FF2B5EF4-FFF2-40B4-BE49-F238E27FC236}">
+                <a16:creationId xmlns:a16="http://schemas.microsoft.com/office/drawing/2014/main" id="{663906BE-2D87-A110-F2C5-B5A0BF5C261C}"/>
+              </a:ext>
+            </a:extLst>
+          </p:cNvPr>
+          <p:cNvSpPr txBox="1"/>
+          <p:nvPr/>
+        </p:nvSpPr>
+        <p:spPr>
+          <a:xfrm>
+            <a:off x="6592465" y="3481892"/>
+            <a:ext cx="412953" cy="307777"/>
+          </a:xfrm>
+          <a:prstGeom prst="rect">
+            <a:avLst/>
+          </a:prstGeom>
+          <a:noFill/>
+        </p:spPr>
+        <p:txBody>
+          <a:bodyPr wrap="square">
+            <a:spAutoFit/>
+          </a:bodyPr>
+          <a:lstStyle/>
+          <a:p>
+            <a:r>
+              <a:rPr lang="en-US" sz="1400" dirty="0">
+                <a:latin typeface="Times New Roman" panose="02020603050405020304" pitchFamily="18" charset="0"/>
+                <a:cs typeface="Times New Roman" panose="02020603050405020304" pitchFamily="18" charset="0"/>
+              </a:rPr>
+              <a:t>Īᵢ⁽ᵏ⁾ </a:t>
+            </a:r>
+          </a:p>
+        </p:txBody>
+      </p:sp>
+      <p:sp>
+        <p:nvSpPr>
+          <p:cNvPr id="19" name="TextBox 18">
+            <a:extLst>
+              <a:ext uri="{FF2B5EF4-FFF2-40B4-BE49-F238E27FC236}">
+                <a16:creationId xmlns:a16="http://schemas.microsoft.com/office/drawing/2014/main" id="{DD5F21EE-1F84-FC45-45C0-9ACC677CA8B5}"/>
+              </a:ext>
+            </a:extLst>
+          </p:cNvPr>
+          <p:cNvSpPr txBox="1"/>
+          <p:nvPr/>
+        </p:nvSpPr>
+        <p:spPr>
+          <a:xfrm>
+            <a:off x="6584431" y="3692543"/>
+            <a:ext cx="685608" cy="307777"/>
+          </a:xfrm>
+          <a:prstGeom prst="rect">
+            <a:avLst/>
+          </a:prstGeom>
+          <a:noFill/>
+        </p:spPr>
+        <p:txBody>
+          <a:bodyPr wrap="square">
+            <a:spAutoFit/>
+          </a:bodyPr>
+          <a:lstStyle/>
+          <a:p>
+            <a:r>
+              <a:rPr lang="en-US" sz="1400" b="1" dirty="0" err="1">
+                <a:latin typeface="Times New Roman" panose="02020603050405020304" pitchFamily="18" charset="0"/>
+                <a:cs typeface="Times New Roman" panose="02020603050405020304" pitchFamily="18" charset="0"/>
+              </a:rPr>
+              <a:t>w</a:t>
+            </a:r>
+            <a:r>
+              <a:rPr lang="en-US" sz="1400" dirty="0" err="1">
+                <a:latin typeface="Times New Roman" panose="02020603050405020304" pitchFamily="18" charset="0"/>
+                <a:cs typeface="Times New Roman" panose="02020603050405020304" pitchFamily="18" charset="0"/>
+              </a:rPr>
+              <a:t>ij</a:t>
+            </a:r>
+            <a:endParaRPr lang="en-US" sz="1400" dirty="0">
+              <a:latin typeface="Times New Roman" panose="02020603050405020304" pitchFamily="18" charset="0"/>
+              <a:cs typeface="Times New Roman" panose="02020603050405020304" pitchFamily="18" charset="0"/>
+            </a:endParaRPr>
+          </a:p>
+        </p:txBody>
+      </p:sp>
+      <p:sp>
+        <p:nvSpPr>
+          <p:cNvPr id="3" name="TextBox 2">
+            <a:extLst>
+              <a:ext uri="{FF2B5EF4-FFF2-40B4-BE49-F238E27FC236}">
+                <a16:creationId xmlns:a16="http://schemas.microsoft.com/office/drawing/2014/main" id="{70C9DEF0-FD71-84FE-9585-9D6E6412DDC9}"/>
+              </a:ext>
+            </a:extLst>
+          </p:cNvPr>
+          <p:cNvSpPr txBox="1"/>
+          <p:nvPr/>
+        </p:nvSpPr>
+        <p:spPr>
+          <a:xfrm>
+            <a:off x="10014673" y="3173604"/>
+            <a:ext cx="663843" cy="261610"/>
+          </a:xfrm>
+          <a:prstGeom prst="rect">
+            <a:avLst/>
+          </a:prstGeom>
+          <a:noFill/>
+        </p:spPr>
+        <p:txBody>
+          <a:bodyPr wrap="square">
+            <a:spAutoFit/>
+          </a:bodyPr>
+          <a:lstStyle/>
+          <a:p>
+            <a:r>
+              <a:rPr lang="en-US" sz="1100" dirty="0">
+                <a:latin typeface="Times New Roman" panose="02020603050405020304" pitchFamily="18" charset="0"/>
+                <a:cs typeface="Times New Roman" panose="02020603050405020304" pitchFamily="18" charset="0"/>
+              </a:rPr>
+              <a:t>Saliency</a:t>
+            </a:r>
+          </a:p>
+        </p:txBody>
+      </p:sp>
+      <p:sp>
+        <p:nvSpPr>
+          <p:cNvPr id="8" name="TextBox 7">
+            <a:extLst>
+              <a:ext uri="{FF2B5EF4-FFF2-40B4-BE49-F238E27FC236}">
+                <a16:creationId xmlns:a16="http://schemas.microsoft.com/office/drawing/2014/main" id="{7FA7AAFE-8ADE-32D8-2918-0AB662920247}"/>
+              </a:ext>
+            </a:extLst>
+          </p:cNvPr>
+          <p:cNvSpPr txBox="1"/>
+          <p:nvPr/>
+        </p:nvSpPr>
+        <p:spPr>
+          <a:xfrm>
+            <a:off x="10024428" y="3685776"/>
+            <a:ext cx="580075" cy="261610"/>
+          </a:xfrm>
+          <a:prstGeom prst="rect">
+            <a:avLst/>
+          </a:prstGeom>
+          <a:noFill/>
+        </p:spPr>
+        <p:txBody>
+          <a:bodyPr wrap="square">
+            <a:spAutoFit/>
+          </a:bodyPr>
+          <a:lstStyle/>
+          <a:p>
+            <a:r>
+              <a:rPr lang="en-US" sz="1100" dirty="0">
+                <a:latin typeface="Times New Roman" panose="02020603050405020304" pitchFamily="18" charset="0"/>
+                <a:cs typeface="Times New Roman" panose="02020603050405020304" pitchFamily="18" charset="0"/>
+              </a:rPr>
+              <a:t>Model</a:t>
             </a:r>
           </a:p>
         </p:txBody>
